--- a/docs/estrategia/presentaciones/Tony-Importados-Marco-Colom.pptx
+++ b/docs/estrategia/presentaciones/Tony-Importados-Marco-Colom.pptx
@@ -18,8 +18,8 @@
   <p:notesMasterIdLst>
     <p:notesMasterId r:id="rId11"/>
   </p:notesMasterIdLst>
-  <p:sldSz cx="12192000" cy="6858000"/>
-  <p:notesSz cx="6858000" cy="12192000"/>
+  <p:sldSz cx="6858000" cy="12188952"/>
+  <p:notesSz cx="12188952" cy="6858000"/>
   <p:defaultTextStyle>
     <a:lvl1pPr marL="0" algn="l" defTabSz="914400" rtl="0" eaLnBrk="1" latinLnBrk="0" hangingPunct="1">
       <a:defRPr sz="1800" kern="1200">
@@ -1621,27 +1621,7 @@
         </p:nvSpPr>
         <p:spPr>
           <a:xfrm>
-            <a:off x="0" y="0"/>
-            <a:ext cx="12188952" cy="6858000"/>
-          </a:xfrm>
-          <a:prstGeom prst="rect">
-            <a:avLst/>
-          </a:prstGeom>
-          <a:solidFill>
-            <a:srgbClr val="0D0D0D"/>
-          </a:solidFill>
-          <a:ln/>
-        </p:spPr>
-      </p:sp>
-      <p:sp>
-        <p:nvSpPr>
-          <p:cNvPr id="3" name="Shape 1"/>
-          <p:cNvSpPr/>
-          <p:nvPr/>
-        </p:nvSpPr>
-        <p:spPr>
-          <a:xfrm>
-            <a:off x="8778240" y="-2377440"/>
+            <a:off x="2926080" y="-3200400"/>
             <a:ext cx="5943600" cy="5943600"/>
           </a:xfrm>
           <a:prstGeom prst="ellipse">
@@ -1655,13 +1635,13 @@
       </p:sp>
       <p:sp>
         <p:nvSpPr>
-          <p:cNvPr id="4" name="Shape 2"/>
-          <p:cNvSpPr/>
-          <p:nvPr/>
-        </p:nvSpPr>
-        <p:spPr>
-          <a:xfrm>
-            <a:off x="-2560320" y="4023360"/>
+          <p:cNvPr id="3" name="Shape 1"/>
+          <p:cNvSpPr/>
+          <p:nvPr/>
+        </p:nvSpPr>
+        <p:spPr>
+          <a:xfrm>
+            <a:off x="-3200400" y="9601200"/>
             <a:ext cx="5029200" cy="5029200"/>
           </a:xfrm>
           <a:prstGeom prst="ellipse">
@@ -1675,30 +1655,30 @@
       </p:sp>
       <p:sp>
         <p:nvSpPr>
-          <p:cNvPr id="5" name="Text 3"/>
-          <p:cNvSpPr/>
-          <p:nvPr/>
-        </p:nvSpPr>
-        <p:spPr>
-          <a:xfrm>
-            <a:off x="777240" y="1417320"/>
-            <a:ext cx="8229600" cy="1371600"/>
-          </a:xfrm>
-          <a:prstGeom prst="rect">
-            <a:avLst/>
-          </a:prstGeom>
-          <a:noFill/>
-          <a:ln/>
-        </p:spPr>
-        <p:txBody>
-          <a:bodyPr wrap="square" lIns="0" tIns="0" rIns="0" bIns="0" rtlCol="0" anchor="ctr"/>
-          <a:lstStyle/>
-          <a:p>
-            <a:pPr indent="0" marL="0">
-              <a:buNone/>
-            </a:pPr>
-            <a:r>
-              <a:rPr lang="en-US" sz="7800" b="1" dirty="0">
+          <p:cNvPr id="4" name="Text 2"/>
+          <p:cNvSpPr/>
+          <p:nvPr/>
+        </p:nvSpPr>
+        <p:spPr>
+          <a:xfrm>
+            <a:off x="457200" y="2468880"/>
+            <a:ext cx="6217920" cy="1234440"/>
+          </a:xfrm>
+          <a:prstGeom prst="rect">
+            <a:avLst/>
+          </a:prstGeom>
+          <a:noFill/>
+          <a:ln/>
+        </p:spPr>
+        <p:txBody>
+          <a:bodyPr wrap="square" lIns="0" tIns="0" rIns="0" bIns="0" rtlCol="0" anchor="ctr"/>
+          <a:lstStyle/>
+          <a:p>
+            <a:pPr indent="0" marL="0">
+              <a:buNone/>
+            </a:pPr>
+            <a:r>
+              <a:rPr lang="en-US" sz="6800" b="1" dirty="0">
                 <a:solidFill>
                   <a:srgbClr val="FF1E1E"/>
                 </a:solidFill>
@@ -1708,24 +1688,24 @@
               </a:rPr>
               <a:t>TONY</a:t>
             </a:r>
-            <a:endParaRPr lang="en-US" sz="7800" dirty="0"/>
-          </a:p>
-        </p:txBody>
-      </p:sp>
-      <p:sp>
-        <p:nvSpPr>
-          <p:cNvPr id="6" name="Shape 4"/>
-          <p:cNvSpPr/>
-          <p:nvPr/>
-        </p:nvSpPr>
-        <p:spPr>
-          <a:xfrm>
-            <a:off x="822960" y="2651760"/>
-            <a:ext cx="4663440" cy="777240"/>
+            <a:endParaRPr lang="en-US" sz="6800" dirty="0"/>
+          </a:p>
+        </p:txBody>
+      </p:sp>
+      <p:sp>
+        <p:nvSpPr>
+          <p:cNvPr id="5" name="Shape 3"/>
+          <p:cNvSpPr/>
+          <p:nvPr/>
+        </p:nvSpPr>
+        <p:spPr>
+          <a:xfrm>
+            <a:off x="502920" y="3657600"/>
+            <a:ext cx="4206240" cy="713232"/>
           </a:xfrm>
           <a:prstGeom prst="roundRect">
             <a:avLst>
-              <a:gd name="adj" fmla="val 7059"/>
+              <a:gd name="adj" fmla="val 7692"/>
             </a:avLst>
           </a:prstGeom>
           <a:solidFill>
@@ -1736,69 +1716,69 @@
       </p:sp>
       <p:sp>
         <p:nvSpPr>
+          <p:cNvPr id="6" name="Text 4"/>
+          <p:cNvSpPr/>
+          <p:nvPr/>
+        </p:nvSpPr>
+        <p:spPr>
+          <a:xfrm>
+            <a:off x="502920" y="3657600"/>
+            <a:ext cx="4206240" cy="713232"/>
+          </a:xfrm>
+          <a:prstGeom prst="rect">
+            <a:avLst/>
+          </a:prstGeom>
+          <a:noFill/>
+          <a:ln/>
+        </p:spPr>
+        <p:txBody>
+          <a:bodyPr wrap="square" lIns="0" tIns="0" rIns="0" bIns="0" rtlCol="0" anchor="ctr"/>
+          <a:lstStyle/>
+          <a:p>
+            <a:pPr algn="ctr" indent="0" marL="0">
+              <a:buNone/>
+            </a:pPr>
+            <a:r>
+              <a:rPr lang="en-US" sz="2500" b="1" spc="200" kern="0" dirty="0">
+                <a:solidFill>
+                  <a:srgbClr val="0D0D0D"/>
+                </a:solidFill>
+                <a:latin typeface="Arial" pitchFamily="34" charset="0"/>
+                <a:ea typeface="Arial" pitchFamily="34" charset="-122"/>
+                <a:cs typeface="Arial" pitchFamily="34" charset="-120"/>
+              </a:rPr>
+              <a:t>IMPORTADOS</a:t>
+            </a:r>
+            <a:endParaRPr lang="en-US" sz="2500" dirty="0"/>
+          </a:p>
+        </p:txBody>
+      </p:sp>
+      <p:sp>
+        <p:nvSpPr>
           <p:cNvPr id="7" name="Text 5"/>
           <p:cNvSpPr/>
           <p:nvPr/>
         </p:nvSpPr>
         <p:spPr>
           <a:xfrm>
-            <a:off x="822960" y="2651760"/>
-            <a:ext cx="4663440" cy="777240"/>
-          </a:xfrm>
-          <a:prstGeom prst="rect">
-            <a:avLst/>
-          </a:prstGeom>
-          <a:noFill/>
-          <a:ln/>
-        </p:spPr>
-        <p:txBody>
-          <a:bodyPr wrap="square" lIns="0" tIns="0" rIns="0" bIns="0" rtlCol="0" anchor="ctr"/>
-          <a:lstStyle/>
-          <a:p>
-            <a:pPr algn="ctr" indent="0" marL="0">
-              <a:buNone/>
-            </a:pPr>
-            <a:r>
-              <a:rPr lang="en-US" sz="3000" b="1" spc="300" kern="0" dirty="0">
-                <a:solidFill>
-                  <a:srgbClr val="0D0D0D"/>
-                </a:solidFill>
-                <a:latin typeface="Arial" pitchFamily="34" charset="0"/>
-                <a:ea typeface="Arial" pitchFamily="34" charset="-122"/>
-                <a:cs typeface="Arial" pitchFamily="34" charset="-120"/>
-              </a:rPr>
-              <a:t>IMPORTADOS</a:t>
-            </a:r>
-            <a:endParaRPr lang="en-US" sz="3000" dirty="0"/>
-          </a:p>
-        </p:txBody>
-      </p:sp>
-      <p:sp>
-        <p:nvSpPr>
-          <p:cNvPr id="8" name="Text 6"/>
-          <p:cNvSpPr/>
-          <p:nvPr/>
-        </p:nvSpPr>
-        <p:spPr>
-          <a:xfrm>
-            <a:off x="5806440" y="2468880"/>
-            <a:ext cx="731520" cy="1005840"/>
-          </a:xfrm>
-          <a:prstGeom prst="rect">
-            <a:avLst/>
-          </a:prstGeom>
-          <a:noFill/>
-          <a:ln/>
-        </p:spPr>
-        <p:txBody>
-          <a:bodyPr wrap="square" lIns="0" tIns="0" rIns="0" bIns="0" rtlCol="0" anchor="ctr"/>
-          <a:lstStyle/>
-          <a:p>
-            <a:pPr algn="ctr" indent="0" marL="0">
-              <a:buNone/>
-            </a:pPr>
-            <a:r>
-              <a:rPr lang="en-US" sz="4000" b="1" dirty="0">
+            <a:off x="502920" y="4617720"/>
+            <a:ext cx="731520" cy="685800"/>
+          </a:xfrm>
+          <a:prstGeom prst="rect">
+            <a:avLst/>
+          </a:prstGeom>
+          <a:noFill/>
+          <a:ln/>
+        </p:spPr>
+        <p:txBody>
+          <a:bodyPr wrap="square" lIns="0" tIns="0" rIns="0" bIns="0" rtlCol="0" anchor="ctr"/>
+          <a:lstStyle/>
+          <a:p>
+            <a:pPr indent="0" marL="0">
+              <a:buNone/>
+            </a:pPr>
+            <a:r>
+              <a:rPr lang="en-US" sz="3400" b="1" dirty="0">
                 <a:solidFill>
                   <a:srgbClr val="6E6E6E"/>
                 </a:solidFill>
@@ -1808,20 +1788,20 @@
               </a:rPr>
               <a:t>×</a:t>
             </a:r>
-            <a:endParaRPr lang="en-US" sz="4000" dirty="0"/>
-          </a:p>
-        </p:txBody>
-      </p:sp>
-      <p:sp>
-        <p:nvSpPr>
-          <p:cNvPr id="9" name="Shape 7"/>
-          <p:cNvSpPr/>
-          <p:nvPr/>
-        </p:nvSpPr>
-        <p:spPr>
-          <a:xfrm>
-            <a:off x="6720840" y="2606040"/>
-            <a:ext cx="914400" cy="914400"/>
+            <a:endParaRPr lang="en-US" sz="3400" dirty="0"/>
+          </a:p>
+        </p:txBody>
+      </p:sp>
+      <p:sp>
+        <p:nvSpPr>
+          <p:cNvPr id="8" name="Shape 6"/>
+          <p:cNvSpPr/>
+          <p:nvPr/>
+        </p:nvSpPr>
+        <p:spPr>
+          <a:xfrm>
+            <a:off x="1371600" y="4709160"/>
+            <a:ext cx="822960" cy="822960"/>
           </a:xfrm>
           <a:prstGeom prst="ellipse">
             <a:avLst/>
@@ -1834,30 +1814,69 @@
       </p:sp>
       <p:sp>
         <p:nvSpPr>
+          <p:cNvPr id="9" name="Text 7"/>
+          <p:cNvSpPr/>
+          <p:nvPr/>
+        </p:nvSpPr>
+        <p:spPr>
+          <a:xfrm>
+            <a:off x="1371600" y="4709160"/>
+            <a:ext cx="822960" cy="822960"/>
+          </a:xfrm>
+          <a:prstGeom prst="rect">
+            <a:avLst/>
+          </a:prstGeom>
+          <a:noFill/>
+          <a:ln/>
+        </p:spPr>
+        <p:txBody>
+          <a:bodyPr wrap="square" lIns="0" tIns="0" rIns="0" bIns="0" rtlCol="0" anchor="ctr"/>
+          <a:lstStyle/>
+          <a:p>
+            <a:pPr algn="ctr" indent="0" marL="0">
+              <a:buNone/>
+            </a:pPr>
+            <a:r>
+              <a:rPr lang="en-US" sz="2000" b="1" dirty="0">
+                <a:solidFill>
+                  <a:srgbClr val="FFFFFF"/>
+                </a:solidFill>
+                <a:latin typeface="Arial" pitchFamily="34" charset="0"/>
+                <a:ea typeface="Arial" pitchFamily="34" charset="-122"/>
+                <a:cs typeface="Arial" pitchFamily="34" charset="-120"/>
+              </a:rPr>
+              <a:t>MC</a:t>
+            </a:r>
+            <a:endParaRPr lang="en-US" sz="2000" dirty="0"/>
+          </a:p>
+        </p:txBody>
+      </p:sp>
+      <p:sp>
+        <p:nvSpPr>
           <p:cNvPr id="10" name="Text 8"/>
           <p:cNvSpPr/>
           <p:nvPr/>
         </p:nvSpPr>
         <p:spPr>
           <a:xfrm>
-            <a:off x="6720840" y="2606040"/>
-            <a:ext cx="914400" cy="914400"/>
-          </a:xfrm>
-          <a:prstGeom prst="rect">
-            <a:avLst/>
-          </a:prstGeom>
-          <a:noFill/>
-          <a:ln/>
-        </p:spPr>
-        <p:txBody>
-          <a:bodyPr wrap="square" lIns="0" tIns="0" rIns="0" bIns="0" rtlCol="0" anchor="ctr"/>
-          <a:lstStyle/>
-          <a:p>
-            <a:pPr algn="ctr" indent="0" marL="0">
-              <a:buNone/>
-            </a:pPr>
-            <a:r>
-              <a:rPr lang="en-US" sz="2200" b="1" dirty="0">
+            <a:off x="2377440" y="4828032"/>
+            <a:ext cx="4114800" cy="365760"/>
+          </a:xfrm>
+          <a:prstGeom prst="rect">
+            <a:avLst/>
+          </a:prstGeom>
+          <a:noFill/>
+          <a:ln/>
+        </p:spPr>
+        <p:txBody>
+          <a:bodyPr wrap="square" lIns="0" tIns="0" rIns="0" bIns="0" rtlCol="0" anchor="ctr"/>
+          <a:lstStyle/>
+          <a:p>
+            <a:pPr indent="0" marL="0">
+              <a:buNone/>
+            </a:pPr>
+            <a:r>
+              <a:rPr lang="en-US" sz="1900" b="1" dirty="0">
                 <a:solidFill>
                   <a:srgbClr val="FFFFFF"/>
                 </a:solidFill>
@@ -1865,9 +1884,9 @@
                 <a:ea typeface="Arial" pitchFamily="34" charset="-122"/>
                 <a:cs typeface="Arial" pitchFamily="34" charset="-120"/>
               </a:rPr>
-              <a:t>MC</a:t>
-            </a:r>
-            <a:endParaRPr lang="en-US" sz="2200" dirty="0"/>
+              <a:t>MARCO COLOM</a:t>
+            </a:r>
+            <a:endParaRPr lang="en-US" sz="1900" dirty="0"/>
           </a:p>
         </p:txBody>
       </p:sp>
@@ -1879,34 +1898,34 @@
         </p:nvSpPr>
         <p:spPr>
           <a:xfrm>
-            <a:off x="7818120" y="2697480"/>
-            <a:ext cx="3291840" cy="411480"/>
-          </a:xfrm>
-          <a:prstGeom prst="rect">
-            <a:avLst/>
-          </a:prstGeom>
-          <a:noFill/>
-          <a:ln/>
-        </p:spPr>
-        <p:txBody>
-          <a:bodyPr wrap="square" lIns="0" tIns="0" rIns="0" bIns="0" rtlCol="0" anchor="ctr"/>
-          <a:lstStyle/>
-          <a:p>
-            <a:pPr indent="0" marL="0">
-              <a:buNone/>
-            </a:pPr>
-            <a:r>
-              <a:rPr lang="en-US" sz="2200" b="1" dirty="0">
-                <a:solidFill>
-                  <a:srgbClr val="FFFFFF"/>
-                </a:solidFill>
-                <a:latin typeface="Arial" pitchFamily="34" charset="0"/>
-                <a:ea typeface="Arial" pitchFamily="34" charset="-122"/>
-                <a:cs typeface="Arial" pitchFamily="34" charset="-120"/>
-              </a:rPr>
-              <a:t>MARCO COLOM</a:t>
-            </a:r>
-            <a:endParaRPr lang="en-US" sz="2200" dirty="0"/>
+            <a:off x="2377440" y="5175504"/>
+            <a:ext cx="4114800" cy="292608"/>
+          </a:xfrm>
+          <a:prstGeom prst="rect">
+            <a:avLst/>
+          </a:prstGeom>
+          <a:noFill/>
+          <a:ln/>
+        </p:spPr>
+        <p:txBody>
+          <a:bodyPr wrap="square" lIns="0" tIns="0" rIns="0" bIns="0" rtlCol="0" anchor="ctr"/>
+          <a:lstStyle/>
+          <a:p>
+            <a:pPr indent="0" marL="0">
+              <a:buNone/>
+            </a:pPr>
+            <a:r>
+              <a:rPr lang="en-US" sz="1200" dirty="0">
+                <a:solidFill>
+                  <a:srgbClr val="00A8FF"/>
+                </a:solidFill>
+                <a:latin typeface="Arial" pitchFamily="34" charset="0"/>
+                <a:ea typeface="Arial" pitchFamily="34" charset="-122"/>
+                <a:cs typeface="Arial" pitchFamily="34" charset="-120"/>
+              </a:rPr>
+              <a:t>@marqo.ec</a:t>
+            </a:r>
+            <a:endParaRPr lang="en-US" sz="1200" dirty="0"/>
           </a:p>
         </p:txBody>
       </p:sp>
@@ -1918,34 +1937,34 @@
         </p:nvSpPr>
         <p:spPr>
           <a:xfrm>
-            <a:off x="7818120" y="3127248"/>
-            <a:ext cx="3291840" cy="320040"/>
-          </a:xfrm>
-          <a:prstGeom prst="rect">
-            <a:avLst/>
-          </a:prstGeom>
-          <a:noFill/>
-          <a:ln/>
-        </p:spPr>
-        <p:txBody>
-          <a:bodyPr wrap="square" lIns="0" tIns="0" rIns="0" bIns="0" rtlCol="0" anchor="ctr"/>
-          <a:lstStyle/>
-          <a:p>
-            <a:pPr indent="0" marL="0">
-              <a:buNone/>
-            </a:pPr>
-            <a:r>
-              <a:rPr lang="en-US" sz="1300" dirty="0">
-                <a:solidFill>
-                  <a:srgbClr val="00A8FF"/>
-                </a:solidFill>
-                <a:latin typeface="Arial" pitchFamily="34" charset="0"/>
-                <a:ea typeface="Arial" pitchFamily="34" charset="-122"/>
-                <a:cs typeface="Arial" pitchFamily="34" charset="-120"/>
-              </a:rPr>
-              <a:t>@marqo.ec</a:t>
-            </a:r>
-            <a:endParaRPr lang="en-US" sz="1300" dirty="0"/>
+            <a:off x="502920" y="6126480"/>
+            <a:ext cx="5486400" cy="365760"/>
+          </a:xfrm>
+          <a:prstGeom prst="rect">
+            <a:avLst/>
+          </a:prstGeom>
+          <a:noFill/>
+          <a:ln/>
+        </p:spPr>
+        <p:txBody>
+          <a:bodyPr wrap="square" lIns="0" tIns="0" rIns="0" bIns="0" rtlCol="0" anchor="ctr"/>
+          <a:lstStyle/>
+          <a:p>
+            <a:pPr indent="0" marL="0">
+              <a:buNone/>
+            </a:pPr>
+            <a:r>
+              <a:rPr lang="en-US" sz="1500" b="1" spc="150" kern="0" dirty="0">
+                <a:solidFill>
+                  <a:srgbClr val="FFD600"/>
+                </a:solidFill>
+                <a:latin typeface="Arial" pitchFamily="34" charset="0"/>
+                <a:ea typeface="Arial" pitchFamily="34" charset="-122"/>
+                <a:cs typeface="Arial" pitchFamily="34" charset="-120"/>
+              </a:rPr>
+              <a:t>UNA PROPUESTA DE COLABORACIÓN</a:t>
+            </a:r>
+            <a:endParaRPr lang="en-US" sz="1500" dirty="0"/>
           </a:p>
         </p:txBody>
       </p:sp>
@@ -1957,34 +1976,37 @@
         </p:nvSpPr>
         <p:spPr>
           <a:xfrm>
-            <a:off x="841248" y="3977640"/>
-            <a:ext cx="8229600" cy="365760"/>
-          </a:xfrm>
-          <a:prstGeom prst="rect">
-            <a:avLst/>
-          </a:prstGeom>
-          <a:noFill/>
-          <a:ln/>
-        </p:spPr>
-        <p:txBody>
-          <a:bodyPr wrap="square" lIns="0" tIns="0" rIns="0" bIns="0" rtlCol="0" anchor="ctr"/>
-          <a:lstStyle/>
-          <a:p>
-            <a:pPr indent="0" marL="0">
-              <a:buNone/>
-            </a:pPr>
-            <a:r>
-              <a:rPr lang="en-US" sz="1600" b="1" spc="200" kern="0" dirty="0">
-                <a:solidFill>
-                  <a:srgbClr val="FFD600"/>
-                </a:solidFill>
-                <a:latin typeface="Arial" pitchFamily="34" charset="0"/>
-                <a:ea typeface="Arial" pitchFamily="34" charset="-122"/>
-                <a:cs typeface="Arial" pitchFamily="34" charset="-120"/>
-              </a:rPr>
-              <a:t>UNA PROPUESTA DE COLABORACIÓN</a:t>
-            </a:r>
-            <a:endParaRPr lang="en-US" sz="1600" dirty="0"/>
+            <a:off x="502920" y="6537960"/>
+            <a:ext cx="5303520" cy="685800"/>
+          </a:xfrm>
+          <a:prstGeom prst="rect">
+            <a:avLst/>
+          </a:prstGeom>
+          <a:noFill/>
+          <a:ln/>
+        </p:spPr>
+        <p:txBody>
+          <a:bodyPr wrap="square" lIns="0" tIns="0" rIns="0" bIns="0" rtlCol="0" anchor="ctr"/>
+          <a:lstStyle/>
+          <a:p>
+            <a:pPr indent="0" marL="0">
+              <a:lnSpc>
+                <a:spcPct val="130000"/>
+              </a:lnSpc>
+              <a:buNone/>
+            </a:pPr>
+            <a:r>
+              <a:rPr lang="en-US" sz="1250" dirty="0">
+                <a:solidFill>
+                  <a:srgbClr val="9A9A9A"/>
+                </a:solidFill>
+                <a:latin typeface="Arial" pitchFamily="34" charset="0"/>
+                <a:ea typeface="Arial" pitchFamily="34" charset="-122"/>
+                <a:cs typeface="Arial" pitchFamily="34" charset="-120"/>
+              </a:rPr>
+              <a:t>Drop Commerce — cómo encajás en el sistema de Drops de Tony</a:t>
+            </a:r>
+            <a:endParaRPr lang="en-US" sz="1250" dirty="0"/>
           </a:p>
         </p:txBody>
       </p:sp>
@@ -1996,46 +2018,7 @@
         </p:nvSpPr>
         <p:spPr>
           <a:xfrm>
-            <a:off x="841248" y="4434840"/>
-            <a:ext cx="8229600" cy="365760"/>
-          </a:xfrm>
-          <a:prstGeom prst="rect">
-            <a:avLst/>
-          </a:prstGeom>
-          <a:noFill/>
-          <a:ln/>
-        </p:spPr>
-        <p:txBody>
-          <a:bodyPr wrap="square" lIns="0" tIns="0" rIns="0" bIns="0" rtlCol="0" anchor="ctr"/>
-          <a:lstStyle/>
-          <a:p>
-            <a:pPr indent="0" marL="0">
-              <a:buNone/>
-            </a:pPr>
-            <a:r>
-              <a:rPr lang="en-US" sz="1400" dirty="0">
-                <a:solidFill>
-                  <a:srgbClr val="9A9A9A"/>
-                </a:solidFill>
-                <a:latin typeface="Arial" pitchFamily="34" charset="0"/>
-                <a:ea typeface="Arial" pitchFamily="34" charset="-122"/>
-                <a:cs typeface="Arial" pitchFamily="34" charset="-120"/>
-              </a:rPr>
-              <a:t>Drop Commerce — cómo encajás en el sistema de Drops de Tony</a:t>
-            </a:r>
-            <a:endParaRPr lang="en-US" sz="1400" dirty="0"/>
-          </a:p>
-        </p:txBody>
-      </p:sp>
-      <p:sp>
-        <p:nvSpPr>
-          <p:cNvPr id="15" name="Text 13"/>
-          <p:cNvSpPr/>
-          <p:nvPr/>
-        </p:nvSpPr>
-        <p:spPr>
-          <a:xfrm>
-            <a:off x="841248" y="6263640"/>
+            <a:off x="502920" y="11475720"/>
             <a:ext cx="5486400" cy="274320"/>
           </a:xfrm>
           <a:prstGeom prst="rect">
@@ -2052,7 +2035,7 @@
               <a:buNone/>
             </a:pPr>
             <a:r>
-              <a:rPr lang="en-US" sz="1000" spc="100" kern="0" dirty="0">
+              <a:rPr lang="en-US" sz="950" spc="80" kern="0" dirty="0">
                 <a:solidFill>
                   <a:srgbClr val="6E6E6E"/>
                 </a:solidFill>
@@ -2062,7 +2045,7 @@
               </a:rPr>
               <a:t>Con BLUR y Cuervo Produce · 14-08-2026</a:t>
             </a:r>
-            <a:endParaRPr lang="en-US" sz="1000" dirty="0"/>
+            <a:endParaRPr lang="en-US" sz="950" dirty="0"/>
           </a:p>
         </p:txBody>
       </p:sp>
@@ -2099,24 +2082,24 @@
         </p:nvSpPr>
         <p:spPr>
           <a:xfrm>
-            <a:off x="640080" y="502920"/>
-            <a:ext cx="9144000" cy="320040"/>
-          </a:xfrm>
-          <a:prstGeom prst="rect">
-            <a:avLst/>
-          </a:prstGeom>
-          <a:noFill/>
-          <a:ln/>
-        </p:spPr>
-        <p:txBody>
-          <a:bodyPr wrap="square" lIns="0" tIns="0" rIns="0" bIns="0" rtlCol="0" anchor="ctr"/>
-          <a:lstStyle/>
-          <a:p>
-            <a:pPr indent="0" marL="0">
-              <a:buNone/>
-            </a:pPr>
-            <a:r>
-              <a:rPr lang="en-US" sz="1300" b="1" spc="200" kern="0" dirty="0">
+            <a:off x="502920" y="548640"/>
+            <a:ext cx="5852160" cy="292608"/>
+          </a:xfrm>
+          <a:prstGeom prst="rect">
+            <a:avLst/>
+          </a:prstGeom>
+          <a:noFill/>
+          <a:ln/>
+        </p:spPr>
+        <p:txBody>
+          <a:bodyPr wrap="square" lIns="0" tIns="0" rIns="0" bIns="0" rtlCol="0" anchor="ctr"/>
+          <a:lstStyle/>
+          <a:p>
+            <a:pPr indent="0" marL="0">
+              <a:buNone/>
+            </a:pPr>
+            <a:r>
+              <a:rPr lang="en-US" sz="1200" b="1" spc="180" kern="0" dirty="0">
                 <a:solidFill>
                   <a:srgbClr val="FF1E1E"/>
                 </a:solidFill>
@@ -2126,7 +2109,7 @@
               </a:rPr>
               <a:t>QUIÉNES SOMOS</a:t>
             </a:r>
-            <a:endParaRPr lang="en-US" sz="1300" dirty="0"/>
+            <a:endParaRPr lang="en-US" sz="1200" dirty="0"/>
           </a:p>
         </p:txBody>
       </p:sp>
@@ -2138,8 +2121,8 @@
         </p:nvSpPr>
         <p:spPr>
           <a:xfrm>
-            <a:off x="640080" y="777240"/>
-            <a:ext cx="10881360" cy="1188720"/>
+            <a:off x="502920" y="914400"/>
+            <a:ext cx="5852160" cy="1417320"/>
           </a:xfrm>
           <a:prstGeom prst="rect">
             <a:avLst/>
@@ -2153,12 +2136,12 @@
           <a:p>
             <a:pPr indent="0" marL="0">
               <a:lnSpc>
-                <a:spcPct val="100000"/>
+                <a:spcPct val="103000"/>
               </a:lnSpc>
               <a:buNone/>
             </a:pPr>
             <a:r>
-              <a:rPr lang="en-US" sz="3000" b="1" dirty="0">
+              <a:rPr lang="en-US" sz="2600" b="1" dirty="0">
                 <a:solidFill>
                   <a:srgbClr val="FFFFFF"/>
                 </a:solidFill>
@@ -2168,7 +2151,7 @@
               </a:rPr>
               <a:t>Tony Importados: indumentaria deportiva importada, por Drops</a:t>
             </a:r>
-            <a:endParaRPr lang="en-US" sz="3000" dirty="0"/>
+            <a:endParaRPr lang="en-US" sz="2600" dirty="0"/>
           </a:p>
         </p:txBody>
       </p:sp>
@@ -2180,12 +2163,12 @@
         </p:nvSpPr>
         <p:spPr>
           <a:xfrm>
-            <a:off x="640080" y="2148840"/>
-            <a:ext cx="3520440" cy="3566160"/>
+            <a:off x="502920" y="2606040"/>
+            <a:ext cx="5852160" cy="2377440"/>
           </a:xfrm>
           <a:prstGeom prst="roundRect">
             <a:avLst>
-              <a:gd name="adj" fmla="val 2338"/>
+              <a:gd name="adj" fmla="val 3462"/>
             </a:avLst>
           </a:prstGeom>
           <a:solidFill>
@@ -2209,7 +2192,7 @@
         </p:nvSpPr>
         <p:spPr>
           <a:xfrm>
-            <a:off x="914400" y="2395728"/>
+            <a:off x="777240" y="2880360"/>
             <a:ext cx="146304" cy="146304"/>
           </a:xfrm>
           <a:prstGeom prst="ellipse">
@@ -2229,23 +2212,20 @@
         </p:nvSpPr>
         <p:spPr>
           <a:xfrm>
-            <a:off x="914400" y="2633472"/>
-            <a:ext cx="3017520" cy="685800"/>
-          </a:xfrm>
-          <a:prstGeom prst="rect">
-            <a:avLst/>
-          </a:prstGeom>
-          <a:noFill/>
-          <a:ln/>
-        </p:spPr>
-        <p:txBody>
-          <a:bodyPr wrap="square" lIns="0" tIns="0" rIns="0" bIns="0" rtlCol="0" anchor="ctr"/>
-          <a:lstStyle/>
-          <a:p>
-            <a:pPr indent="0" marL="0">
-              <a:lnSpc>
-                <a:spcPct val="115000"/>
-              </a:lnSpc>
+            <a:off x="1033272" y="2779776"/>
+            <a:ext cx="5029200" cy="365760"/>
+          </a:xfrm>
+          <a:prstGeom prst="rect">
+            <a:avLst/>
+          </a:prstGeom>
+          <a:noFill/>
+          <a:ln/>
+        </p:spPr>
+        <p:txBody>
+          <a:bodyPr wrap="square" lIns="0" tIns="0" rIns="0" bIns="0" rtlCol="0" anchor="ctr"/>
+          <a:lstStyle/>
+          <a:p>
+            <a:pPr indent="0" marL="0">
               <a:buNone/>
             </a:pPr>
             <a:r>
@@ -2271,8 +2251,8 @@
         </p:nvSpPr>
         <p:spPr>
           <a:xfrm>
-            <a:off x="914400" y="3337560"/>
-            <a:ext cx="3017520" cy="2194560"/>
+            <a:off x="777240" y="3291840"/>
+            <a:ext cx="5303520" cy="1463040"/>
           </a:xfrm>
           <a:prstGeom prst="rect">
             <a:avLst/>
@@ -2313,12 +2293,12 @@
         </p:nvSpPr>
         <p:spPr>
           <a:xfrm>
-            <a:off x="4343400" y="2148840"/>
-            <a:ext cx="3520440" cy="3566160"/>
+            <a:off x="502920" y="5166360"/>
+            <a:ext cx="5852160" cy="2377440"/>
           </a:xfrm>
           <a:prstGeom prst="roundRect">
             <a:avLst>
-              <a:gd name="adj" fmla="val 2338"/>
+              <a:gd name="adj" fmla="val 3462"/>
             </a:avLst>
           </a:prstGeom>
           <a:solidFill>
@@ -2342,7 +2322,7 @@
         </p:nvSpPr>
         <p:spPr>
           <a:xfrm>
-            <a:off x="4617720" y="2395728"/>
+            <a:off x="777240" y="5440680"/>
             <a:ext cx="146304" cy="146304"/>
           </a:xfrm>
           <a:prstGeom prst="ellipse">
@@ -2362,23 +2342,20 @@
         </p:nvSpPr>
         <p:spPr>
           <a:xfrm>
-            <a:off x="4617720" y="2633472"/>
-            <a:ext cx="3017520" cy="685800"/>
-          </a:xfrm>
-          <a:prstGeom prst="rect">
-            <a:avLst/>
-          </a:prstGeom>
-          <a:noFill/>
-          <a:ln/>
-        </p:spPr>
-        <p:txBody>
-          <a:bodyPr wrap="square" lIns="0" tIns="0" rIns="0" bIns="0" rtlCol="0" anchor="ctr"/>
-          <a:lstStyle/>
-          <a:p>
-            <a:pPr indent="0" marL="0">
-              <a:lnSpc>
-                <a:spcPct val="115000"/>
-              </a:lnSpc>
+            <a:off x="1033272" y="5340096"/>
+            <a:ext cx="5029200" cy="365760"/>
+          </a:xfrm>
+          <a:prstGeom prst="rect">
+            <a:avLst/>
+          </a:prstGeom>
+          <a:noFill/>
+          <a:ln/>
+        </p:spPr>
+        <p:txBody>
+          <a:bodyPr wrap="square" lIns="0" tIns="0" rIns="0" bIns="0" rtlCol="0" anchor="ctr"/>
+          <a:lstStyle/>
+          <a:p>
+            <a:pPr indent="0" marL="0">
               <a:buNone/>
             </a:pPr>
             <a:r>
@@ -2404,8 +2381,8 @@
         </p:nvSpPr>
         <p:spPr>
           <a:xfrm>
-            <a:off x="4617720" y="3337560"/>
-            <a:ext cx="3017520" cy="2194560"/>
+            <a:off x="777240" y="5852160"/>
+            <a:ext cx="5303520" cy="1463040"/>
           </a:xfrm>
           <a:prstGeom prst="rect">
             <a:avLst/>
@@ -2446,12 +2423,12 @@
         </p:nvSpPr>
         <p:spPr>
           <a:xfrm>
-            <a:off x="8046720" y="2148840"/>
-            <a:ext cx="3520440" cy="3566160"/>
+            <a:off x="502920" y="7726680"/>
+            <a:ext cx="5852160" cy="2377440"/>
           </a:xfrm>
           <a:prstGeom prst="roundRect">
             <a:avLst>
-              <a:gd name="adj" fmla="val 2338"/>
+              <a:gd name="adj" fmla="val 3462"/>
             </a:avLst>
           </a:prstGeom>
           <a:solidFill>
@@ -2475,7 +2452,7 @@
         </p:nvSpPr>
         <p:spPr>
           <a:xfrm>
-            <a:off x="8321040" y="2395728"/>
+            <a:off x="777240" y="8001000"/>
             <a:ext cx="146304" cy="146304"/>
           </a:xfrm>
           <a:prstGeom prst="ellipse">
@@ -2495,23 +2472,20 @@
         </p:nvSpPr>
         <p:spPr>
           <a:xfrm>
-            <a:off x="8321040" y="2633472"/>
-            <a:ext cx="3017520" cy="685800"/>
-          </a:xfrm>
-          <a:prstGeom prst="rect">
-            <a:avLst/>
-          </a:prstGeom>
-          <a:noFill/>
-          <a:ln/>
-        </p:spPr>
-        <p:txBody>
-          <a:bodyPr wrap="square" lIns="0" tIns="0" rIns="0" bIns="0" rtlCol="0" anchor="ctr"/>
-          <a:lstStyle/>
-          <a:p>
-            <a:pPr indent="0" marL="0">
-              <a:lnSpc>
-                <a:spcPct val="115000"/>
-              </a:lnSpc>
+            <a:off x="1033272" y="7900416"/>
+            <a:ext cx="5029200" cy="365760"/>
+          </a:xfrm>
+          <a:prstGeom prst="rect">
+            <a:avLst/>
+          </a:prstGeom>
+          <a:noFill/>
+          <a:ln/>
+        </p:spPr>
+        <p:txBody>
+          <a:bodyPr wrap="square" lIns="0" tIns="0" rIns="0" bIns="0" rtlCol="0" anchor="ctr"/>
+          <a:lstStyle/>
+          <a:p>
+            <a:pPr indent="0" marL="0">
               <a:buNone/>
             </a:pPr>
             <a:r>
@@ -2537,8 +2511,8 @@
         </p:nvSpPr>
         <p:spPr>
           <a:xfrm>
-            <a:off x="8321040" y="3337560"/>
-            <a:ext cx="3017520" cy="2194560"/>
+            <a:off x="777240" y="8412480"/>
+            <a:ext cx="5303520" cy="1463040"/>
           </a:xfrm>
           <a:prstGeom prst="rect">
             <a:avLst/>
@@ -2579,8 +2553,8 @@
         </p:nvSpPr>
         <p:spPr>
           <a:xfrm>
-            <a:off x="11365992" y="6400800"/>
-            <a:ext cx="548640" cy="274320"/>
+            <a:off x="5989320" y="11750040"/>
+            <a:ext cx="457200" cy="256032"/>
           </a:xfrm>
           <a:prstGeom prst="rect">
             <a:avLst/>
@@ -2596,7 +2570,7 @@
               <a:buNone/>
             </a:pPr>
             <a:r>
-              <a:rPr lang="en-US" sz="1000" dirty="0">
+              <a:rPr lang="en-US" sz="900" dirty="0">
                 <a:solidFill>
                   <a:srgbClr val="6E6E6E"/>
                 </a:solidFill>
@@ -2606,7 +2580,7 @@
               </a:rPr>
               <a:t>02</a:t>
             </a:r>
-            <a:endParaRPr lang="en-US" sz="1000" dirty="0"/>
+            <a:endParaRPr lang="en-US" sz="900" dirty="0"/>
           </a:p>
         </p:txBody>
       </p:sp>
@@ -2618,8 +2592,8 @@
         </p:nvSpPr>
         <p:spPr>
           <a:xfrm>
-            <a:off x="457200" y="6400800"/>
-            <a:ext cx="5486400" cy="274320"/>
+            <a:off x="502920" y="11750040"/>
+            <a:ext cx="4114800" cy="256032"/>
           </a:xfrm>
           <a:prstGeom prst="rect">
             <a:avLst/>
@@ -2635,7 +2609,7 @@
               <a:buNone/>
             </a:pPr>
             <a:r>
-              <a:rPr lang="en-US" sz="900" spc="100" kern="0" dirty="0">
+              <a:rPr lang="en-US" sz="800" spc="50" kern="0" dirty="0">
                 <a:solidFill>
                   <a:srgbClr val="6E6E6E"/>
                 </a:solidFill>
@@ -2645,7 +2619,7 @@
               </a:rPr>
               <a:t>TONY IMPORTADOS × MARCO</a:t>
             </a:r>
-            <a:endParaRPr lang="en-US" sz="900" dirty="0"/>
+            <a:endParaRPr lang="en-US" sz="800" dirty="0"/>
           </a:p>
         </p:txBody>
       </p:sp>
@@ -2682,24 +2656,24 @@
         </p:nvSpPr>
         <p:spPr>
           <a:xfrm>
-            <a:off x="640080" y="502920"/>
-            <a:ext cx="9144000" cy="320040"/>
-          </a:xfrm>
-          <a:prstGeom prst="rect">
-            <a:avLst/>
-          </a:prstGeom>
-          <a:noFill/>
-          <a:ln/>
-        </p:spPr>
-        <p:txBody>
-          <a:bodyPr wrap="square" lIns="0" tIns="0" rIns="0" bIns="0" rtlCol="0" anchor="ctr"/>
-          <a:lstStyle/>
-          <a:p>
-            <a:pPr indent="0" marL="0">
-              <a:buNone/>
-            </a:pPr>
-            <a:r>
-              <a:rPr lang="en-US" sz="1300" b="1" spc="200" kern="0" dirty="0">
+            <a:off x="502920" y="548640"/>
+            <a:ext cx="5852160" cy="292608"/>
+          </a:xfrm>
+          <a:prstGeom prst="rect">
+            <a:avLst/>
+          </a:prstGeom>
+          <a:noFill/>
+          <a:ln/>
+        </p:spPr>
+        <p:txBody>
+          <a:bodyPr wrap="square" lIns="0" tIns="0" rIns="0" bIns="0" rtlCol="0" anchor="ctr"/>
+          <a:lstStyle/>
+          <a:p>
+            <a:pPr indent="0" marL="0">
+              <a:buNone/>
+            </a:pPr>
+            <a:r>
+              <a:rPr lang="en-US" sz="1200" b="1" spc="180" kern="0" dirty="0">
                 <a:solidFill>
                   <a:srgbClr val="FFD600"/>
                 </a:solidFill>
@@ -2709,7 +2683,7 @@
               </a:rPr>
               <a:t>POR QUÉ VOS</a:t>
             </a:r>
-            <a:endParaRPr lang="en-US" sz="1300" dirty="0"/>
+            <a:endParaRPr lang="en-US" sz="1200" dirty="0"/>
           </a:p>
         </p:txBody>
       </p:sp>
@@ -2721,8 +2695,8 @@
         </p:nvSpPr>
         <p:spPr>
           <a:xfrm>
-            <a:off x="640080" y="777240"/>
-            <a:ext cx="10881360" cy="1188720"/>
+            <a:off x="502920" y="914400"/>
+            <a:ext cx="5852160" cy="1417320"/>
           </a:xfrm>
           <a:prstGeom prst="rect">
             <a:avLst/>
@@ -2736,12 +2710,12 @@
           <a:p>
             <a:pPr indent="0" marL="0">
               <a:lnSpc>
-                <a:spcPct val="100000"/>
+                <a:spcPct val="103000"/>
               </a:lnSpc>
               <a:buNone/>
             </a:pPr>
             <a:r>
-              <a:rPr lang="en-US" sz="3000" b="1" dirty="0">
+              <a:rPr lang="en-US" sz="2600" b="1" dirty="0">
                 <a:solidFill>
                   <a:srgbClr val="FFFFFF"/>
                 </a:solidFill>
@@ -2751,7 +2725,7 @@
               </a:rPr>
               <a:t>No arrancamos de cero — ya estás en la conversación</a:t>
             </a:r>
-            <a:endParaRPr lang="en-US" sz="3000" dirty="0"/>
+            <a:endParaRPr lang="en-US" sz="2600" dirty="0"/>
           </a:p>
         </p:txBody>
       </p:sp>
@@ -2763,12 +2737,12 @@
         </p:nvSpPr>
         <p:spPr>
           <a:xfrm>
-            <a:off x="640080" y="2148840"/>
-            <a:ext cx="5029200" cy="3977640"/>
+            <a:off x="502920" y="2606040"/>
+            <a:ext cx="5852160" cy="3657600"/>
           </a:xfrm>
           <a:prstGeom prst="roundRect">
             <a:avLst>
-              <a:gd name="adj" fmla="val 2069"/>
+              <a:gd name="adj" fmla="val 2250"/>
             </a:avLst>
           </a:prstGeom>
           <a:solidFill>
@@ -2792,8 +2766,8 @@
         </p:nvSpPr>
         <p:spPr>
           <a:xfrm>
-            <a:off x="914400" y="2423160"/>
-            <a:ext cx="914400" cy="914400"/>
+            <a:off x="777240" y="2880360"/>
+            <a:ext cx="822960" cy="822960"/>
           </a:xfrm>
           <a:prstGeom prst="ellipse">
             <a:avLst/>
@@ -2812,8 +2786,8 @@
         </p:nvSpPr>
         <p:spPr>
           <a:xfrm>
-            <a:off x="914400" y="2423160"/>
-            <a:ext cx="914400" cy="914400"/>
+            <a:off x="777240" y="2880360"/>
+            <a:ext cx="822960" cy="822960"/>
           </a:xfrm>
           <a:prstGeom prst="rect">
             <a:avLst/>
@@ -2829,7 +2803,7 @@
               <a:buNone/>
             </a:pPr>
             <a:r>
-              <a:rPr lang="en-US" sz="2200" b="1" dirty="0">
+              <a:rPr lang="en-US" sz="2000" b="1" dirty="0">
                 <a:solidFill>
                   <a:srgbClr val="FFFFFF"/>
                 </a:solidFill>
@@ -2839,7 +2813,7 @@
               </a:rPr>
               <a:t>MC</a:t>
             </a:r>
-            <a:endParaRPr lang="en-US" sz="2200" dirty="0"/>
+            <a:endParaRPr lang="en-US" sz="2000" dirty="0"/>
           </a:p>
         </p:txBody>
       </p:sp>
@@ -2851,24 +2825,24 @@
         </p:nvSpPr>
         <p:spPr>
           <a:xfrm>
-            <a:off x="1965960" y="2542032"/>
-            <a:ext cx="3474720" cy="365760"/>
-          </a:xfrm>
-          <a:prstGeom prst="rect">
-            <a:avLst/>
-          </a:prstGeom>
-          <a:noFill/>
-          <a:ln/>
-        </p:spPr>
-        <p:txBody>
-          <a:bodyPr wrap="square" lIns="0" tIns="0" rIns="0" bIns="0" rtlCol="0" anchor="ctr"/>
-          <a:lstStyle/>
-          <a:p>
-            <a:pPr indent="0" marL="0">
-              <a:buNone/>
-            </a:pPr>
-            <a:r>
-              <a:rPr lang="en-US" sz="1700" b="1" dirty="0">
+            <a:off x="1783080" y="2999232"/>
+            <a:ext cx="3200400" cy="365760"/>
+          </a:xfrm>
+          <a:prstGeom prst="rect">
+            <a:avLst/>
+          </a:prstGeom>
+          <a:noFill/>
+          <a:ln/>
+        </p:spPr>
+        <p:txBody>
+          <a:bodyPr wrap="square" lIns="0" tIns="0" rIns="0" bIns="0" rtlCol="0" anchor="ctr"/>
+          <a:lstStyle/>
+          <a:p>
+            <a:pPr indent="0" marL="0">
+              <a:buNone/>
+            </a:pPr>
+            <a:r>
+              <a:rPr lang="en-US" sz="1600" b="1" dirty="0">
                 <a:solidFill>
                   <a:srgbClr val="FFFFFF"/>
                 </a:solidFill>
@@ -2878,7 +2852,7 @@
               </a:rPr>
               <a:t>@marqo.ec</a:t>
             </a:r>
-            <a:endParaRPr lang="en-US" sz="1700" dirty="0"/>
+            <a:endParaRPr lang="en-US" sz="1600" dirty="0"/>
           </a:p>
         </p:txBody>
       </p:sp>
@@ -2890,24 +2864,24 @@
         </p:nvSpPr>
         <p:spPr>
           <a:xfrm>
-            <a:off x="1965960" y="2944368"/>
-            <a:ext cx="3474720" cy="320040"/>
-          </a:xfrm>
-          <a:prstGeom prst="rect">
-            <a:avLst/>
-          </a:prstGeom>
-          <a:noFill/>
-          <a:ln/>
-        </p:spPr>
-        <p:txBody>
-          <a:bodyPr wrap="square" lIns="0" tIns="0" rIns="0" bIns="0" rtlCol="0" anchor="ctr"/>
-          <a:lstStyle/>
-          <a:p>
-            <a:pPr indent="0" marL="0">
-              <a:buNone/>
-            </a:pPr>
-            <a:r>
-              <a:rPr lang="en-US" sz="1200" b="1" dirty="0">
+            <a:off x="1783080" y="3364992"/>
+            <a:ext cx="3200400" cy="320040"/>
+          </a:xfrm>
+          <a:prstGeom prst="rect">
+            <a:avLst/>
+          </a:prstGeom>
+          <a:noFill/>
+          <a:ln/>
+        </p:spPr>
+        <p:txBody>
+          <a:bodyPr wrap="square" lIns="0" tIns="0" rIns="0" bIns="0" rtlCol="0" anchor="ctr"/>
+          <a:lstStyle/>
+          <a:p>
+            <a:pPr indent="0" marL="0">
+              <a:buNone/>
+            </a:pPr>
+            <a:r>
+              <a:rPr lang="en-US" sz="1150" b="1" dirty="0">
                 <a:solidFill>
                   <a:srgbClr val="00A8FF"/>
                 </a:solidFill>
@@ -2917,7 +2891,7 @@
               </a:rPr>
               <a:t>108K seguidores</a:t>
             </a:r>
-            <a:endParaRPr lang="en-US" sz="1200" dirty="0"/>
+            <a:endParaRPr lang="en-US" sz="1150" dirty="0"/>
           </a:p>
         </p:txBody>
       </p:sp>
@@ -2929,8 +2903,8 @@
         </p:nvSpPr>
         <p:spPr>
           <a:xfrm>
-            <a:off x="914400" y="3520440"/>
-            <a:ext cx="4480560" cy="548640"/>
+            <a:off x="777240" y="3931920"/>
+            <a:ext cx="5303520" cy="502920"/>
           </a:xfrm>
           <a:prstGeom prst="rect">
             <a:avLst/>
@@ -2971,8 +2945,8 @@
         </p:nvSpPr>
         <p:spPr>
           <a:xfrm>
-            <a:off x="914400" y="4114800"/>
-            <a:ext cx="4480560" cy="914400"/>
+            <a:off x="777240" y="4480560"/>
+            <a:ext cx="5303520" cy="777240"/>
           </a:xfrm>
           <a:prstGeom prst="rect">
             <a:avLst/>
@@ -2986,12 +2960,12 @@
           <a:p>
             <a:pPr indent="0" marL="0">
               <a:lnSpc>
-                <a:spcPct val="130000"/>
+                <a:spcPct val="128000"/>
               </a:lnSpc>
               <a:buNone/>
             </a:pPr>
             <a:r>
-              <a:rPr lang="en-US" sz="1200" dirty="0">
+              <a:rPr lang="en-US" sz="1150" dirty="0">
                 <a:solidFill>
                   <a:srgbClr val="9A9A9A"/>
                 </a:solidFill>
@@ -3001,7 +2975,7 @@
               </a:rPr>
               <a:t>Tu propio proyecto ya te pone del lado de quien arma algo desde cero — exactamente la historia que también queremos contar con Tony.</a:t>
             </a:r>
-            <a:endParaRPr lang="en-US" sz="1200" dirty="0"/>
+            <a:endParaRPr lang="en-US" sz="1150" dirty="0"/>
           </a:p>
         </p:txBody>
       </p:sp>
@@ -3013,8 +2987,8 @@
         </p:nvSpPr>
         <p:spPr>
           <a:xfrm>
-            <a:off x="914400" y="5166360"/>
-            <a:ext cx="4480560" cy="0"/>
+            <a:off x="777240" y="5349240"/>
+            <a:ext cx="5303520" cy="0"/>
           </a:xfrm>
           <a:prstGeom prst="line">
             <a:avLst/>
@@ -3036,8 +3010,8 @@
         </p:nvSpPr>
         <p:spPr>
           <a:xfrm>
-            <a:off x="914400" y="5303520"/>
-            <a:ext cx="4480560" cy="685800"/>
+            <a:off x="777240" y="5486400"/>
+            <a:ext cx="5303520" cy="640080"/>
           </a:xfrm>
           <a:prstGeom prst="rect">
             <a:avLst/>
@@ -3078,12 +3052,12 @@
         </p:nvSpPr>
         <p:spPr>
           <a:xfrm>
-            <a:off x="5989320" y="2148840"/>
-            <a:ext cx="5559552" cy="3977640"/>
+            <a:off x="502920" y="6400800"/>
+            <a:ext cx="5852160" cy="2697480"/>
           </a:xfrm>
           <a:prstGeom prst="roundRect">
             <a:avLst>
-              <a:gd name="adj" fmla="val 2069"/>
+              <a:gd name="adj" fmla="val 3051"/>
             </a:avLst>
           </a:prstGeom>
           <a:solidFill>
@@ -3107,24 +3081,24 @@
         </p:nvSpPr>
         <p:spPr>
           <a:xfrm>
-            <a:off x="6263640" y="2377440"/>
-            <a:ext cx="5029200" cy="274320"/>
-          </a:xfrm>
-          <a:prstGeom prst="rect">
-            <a:avLst/>
-          </a:prstGeom>
-          <a:noFill/>
-          <a:ln/>
-        </p:spPr>
-        <p:txBody>
-          <a:bodyPr wrap="square" lIns="0" tIns="0" rIns="0" bIns="0" rtlCol="0" anchor="ctr"/>
-          <a:lstStyle/>
-          <a:p>
-            <a:pPr indent="0" marL="0">
-              <a:buNone/>
-            </a:pPr>
-            <a:r>
-              <a:rPr lang="en-US" sz="1100" b="1" spc="150" kern="0" dirty="0">
+            <a:off x="777240" y="6629400"/>
+            <a:ext cx="5303520" cy="274320"/>
+          </a:xfrm>
+          <a:prstGeom prst="rect">
+            <a:avLst/>
+          </a:prstGeom>
+          <a:noFill/>
+          <a:ln/>
+        </p:spPr>
+        <p:txBody>
+          <a:bodyPr wrap="square" lIns="0" tIns="0" rIns="0" bIns="0" rtlCol="0" anchor="ctr"/>
+          <a:lstStyle/>
+          <a:p>
+            <a:pPr indent="0" marL="0">
+              <a:buNone/>
+            </a:pPr>
+            <a:r>
+              <a:rPr lang="en-US" sz="1100" b="1" spc="120" kern="0" dirty="0">
                 <a:solidFill>
                   <a:srgbClr val="9A9A9A"/>
                 </a:solidFill>
@@ -3146,8 +3120,8 @@
         </p:nvSpPr>
         <p:spPr>
           <a:xfrm>
-            <a:off x="6263640" y="2743200"/>
-            <a:ext cx="320040" cy="457200"/>
+            <a:off x="777240" y="6995160"/>
+            <a:ext cx="320040" cy="502920"/>
           </a:xfrm>
           <a:prstGeom prst="rect">
             <a:avLst/>
@@ -3185,8 +3159,8 @@
         </p:nvSpPr>
         <p:spPr>
           <a:xfrm>
-            <a:off x="6583680" y="2761488"/>
-            <a:ext cx="4846320" cy="548640"/>
+            <a:off x="1124712" y="7013448"/>
+            <a:ext cx="4937760" cy="594360"/>
           </a:xfrm>
           <a:prstGeom prst="rect">
             <a:avLst/>
@@ -3205,7 +3179,7 @@
               <a:buNone/>
             </a:pPr>
             <a:r>
-              <a:rPr lang="en-US" sz="1250" dirty="0">
+              <a:rPr lang="en-US" sz="1150" dirty="0">
                 <a:solidFill>
                   <a:srgbClr val="FFFFFF"/>
                 </a:solidFill>
@@ -3215,7 +3189,7 @@
               </a:rPr>
               <a:t>Convertir todo tu contenido en publicidad.</a:t>
             </a:r>
-            <a:endParaRPr lang="en-US" sz="1250" dirty="0"/>
+            <a:endParaRPr lang="en-US" sz="1150" dirty="0"/>
           </a:p>
         </p:txBody>
       </p:sp>
@@ -3227,8 +3201,8 @@
         </p:nvSpPr>
         <p:spPr>
           <a:xfrm>
-            <a:off x="6263640" y="3401568"/>
-            <a:ext cx="320040" cy="457200"/>
+            <a:off x="777240" y="7635240"/>
+            <a:ext cx="320040" cy="502920"/>
           </a:xfrm>
           <a:prstGeom prst="rect">
             <a:avLst/>
@@ -3266,8 +3240,8 @@
         </p:nvSpPr>
         <p:spPr>
           <a:xfrm>
-            <a:off x="6583680" y="3419856"/>
-            <a:ext cx="4846320" cy="548640"/>
+            <a:off x="1124712" y="7653528"/>
+            <a:ext cx="4937760" cy="594360"/>
           </a:xfrm>
           <a:prstGeom prst="rect">
             <a:avLst/>
@@ -3286,7 +3260,7 @@
               <a:buNone/>
             </a:pPr>
             <a:r>
-              <a:rPr lang="en-US" sz="1250" dirty="0">
+              <a:rPr lang="en-US" sz="1150" dirty="0">
                 <a:solidFill>
                   <a:srgbClr val="FFFFFF"/>
                 </a:solidFill>
@@ -3296,7 +3270,7 @@
               </a:rPr>
               <a:t>Forzarte a hablar de moda si no es lo tuyo — tu cancha es fútbol y viajes.</a:t>
             </a:r>
-            <a:endParaRPr lang="en-US" sz="1250" dirty="0"/>
+            <a:endParaRPr lang="en-US" sz="1150" dirty="0"/>
           </a:p>
         </p:txBody>
       </p:sp>
@@ -3308,8 +3282,8 @@
         </p:nvSpPr>
         <p:spPr>
           <a:xfrm>
-            <a:off x="6263640" y="4059936"/>
-            <a:ext cx="320040" cy="457200"/>
+            <a:off x="777240" y="8275320"/>
+            <a:ext cx="320040" cy="502920"/>
           </a:xfrm>
           <a:prstGeom prst="rect">
             <a:avLst/>
@@ -3347,8 +3321,8 @@
         </p:nvSpPr>
         <p:spPr>
           <a:xfrm>
-            <a:off x="6583680" y="4078224"/>
-            <a:ext cx="4846320" cy="548640"/>
+            <a:off x="1124712" y="8293608"/>
+            <a:ext cx="4937760" cy="594360"/>
           </a:xfrm>
           <a:prstGeom prst="rect">
             <a:avLst/>
@@ -3367,7 +3341,7 @@
               <a:buNone/>
             </a:pPr>
             <a:r>
-              <a:rPr lang="en-US" sz="1250" dirty="0">
+              <a:rPr lang="en-US" sz="1150" dirty="0">
                 <a:solidFill>
                   <a:srgbClr val="FFFFFF"/>
                 </a:solidFill>
@@ -3377,32 +3351,48 @@
               </a:rPr>
               <a:t>Pedirte nada que no puedas mostrar de forma real, sin guion forzado.</a:t>
             </a:r>
-            <a:endParaRPr lang="en-US" sz="1250" dirty="0"/>
-          </a:p>
-        </p:txBody>
-      </p:sp>
-      <p:sp>
-        <p:nvSpPr>
-          <p:cNvPr id="21" name="Shape 19"/>
-          <p:cNvSpPr/>
-          <p:nvPr/>
-        </p:nvSpPr>
-        <p:spPr>
-          <a:xfrm>
-            <a:off x="6263640" y="4892040"/>
-            <a:ext cx="4983480" cy="0"/>
-          </a:xfrm>
-          <a:prstGeom prst="line">
-            <a:avLst/>
-          </a:prstGeom>
-          <a:noFill/>
-          <a:ln w="12700">
-            <a:solidFill>
-              <a:srgbClr val="2A2A2A"/>
-            </a:solidFill>
-            <a:prstDash val="solid"/>
-          </a:ln>
-        </p:spPr>
+            <a:endParaRPr lang="en-US" sz="1150" dirty="0"/>
+          </a:p>
+        </p:txBody>
+      </p:sp>
+      <p:sp>
+        <p:nvSpPr>
+          <p:cNvPr id="21" name="Text 19"/>
+          <p:cNvSpPr/>
+          <p:nvPr/>
+        </p:nvSpPr>
+        <p:spPr>
+          <a:xfrm>
+            <a:off x="5989320" y="11750040"/>
+            <a:ext cx="457200" cy="256032"/>
+          </a:xfrm>
+          <a:prstGeom prst="rect">
+            <a:avLst/>
+          </a:prstGeom>
+          <a:noFill/>
+          <a:ln/>
+        </p:spPr>
+        <p:txBody>
+          <a:bodyPr wrap="square" lIns="0" tIns="0" rIns="0" bIns="0" rtlCol="0" anchor="ctr"/>
+          <a:lstStyle/>
+          <a:p>
+            <a:pPr algn="r" indent="0" marL="0">
+              <a:buNone/>
+            </a:pPr>
+            <a:r>
+              <a:rPr lang="en-US" sz="900" dirty="0">
+                <a:solidFill>
+                  <a:srgbClr val="6E6E6E"/>
+                </a:solidFill>
+                <a:latin typeface="Arial" pitchFamily="34" charset="0"/>
+                <a:ea typeface="Arial" pitchFamily="34" charset="-122"/>
+                <a:cs typeface="Arial" pitchFamily="34" charset="-120"/>
+              </a:rPr>
+              <a:t>03</a:t>
+            </a:r>
+            <a:endParaRPr lang="en-US" sz="900" dirty="0"/>
+          </a:p>
+        </p:txBody>
       </p:sp>
       <p:sp>
         <p:nvSpPr>
@@ -3412,66 +3402,24 @@
         </p:nvSpPr>
         <p:spPr>
           <a:xfrm>
-            <a:off x="6263640" y="5029200"/>
-            <a:ext cx="4983480" cy="960120"/>
-          </a:xfrm>
-          <a:prstGeom prst="rect">
-            <a:avLst/>
-          </a:prstGeom>
-          <a:noFill/>
-          <a:ln/>
-        </p:spPr>
-        <p:txBody>
-          <a:bodyPr wrap="square" lIns="0" tIns="0" rIns="0" bIns="0" rtlCol="0" anchor="ctr"/>
-          <a:lstStyle/>
-          <a:p>
-            <a:pPr indent="0" marL="0">
-              <a:lnSpc>
-                <a:spcPct val="125000"/>
-              </a:lnSpc>
-              <a:buNone/>
-            </a:pPr>
-            <a:r>
-              <a:rPr lang="en-US" sz="1250" i="1" dirty="0">
-                <a:solidFill>
-                  <a:srgbClr val="FFD600"/>
-                </a:solidFill>
-                <a:latin typeface="Arial" pitchFamily="34" charset="0"/>
-                <a:ea typeface="Arial" pitchFamily="34" charset="-122"/>
-                <a:cs typeface="Arial" pitchFamily="34" charset="-120"/>
-              </a:rPr>
-              <a:t>Lo que sí: contenido que ya se parece a lo que hacés, con el sistema de Drops de Tony como una capa más, no un reemplazo.</a:t>
-            </a:r>
-            <a:endParaRPr lang="en-US" sz="1250" dirty="0"/>
-          </a:p>
-        </p:txBody>
-      </p:sp>
-      <p:sp>
-        <p:nvSpPr>
-          <p:cNvPr id="23" name="Text 21"/>
-          <p:cNvSpPr/>
-          <p:nvPr/>
-        </p:nvSpPr>
-        <p:spPr>
-          <a:xfrm>
-            <a:off x="11365992" y="6400800"/>
-            <a:ext cx="548640" cy="274320"/>
-          </a:xfrm>
-          <a:prstGeom prst="rect">
-            <a:avLst/>
-          </a:prstGeom>
-          <a:noFill/>
-          <a:ln/>
-        </p:spPr>
-        <p:txBody>
-          <a:bodyPr wrap="square" lIns="0" tIns="0" rIns="0" bIns="0" rtlCol="0" anchor="ctr"/>
-          <a:lstStyle/>
-          <a:p>
-            <a:pPr algn="r" indent="0" marL="0">
-              <a:buNone/>
-            </a:pPr>
-            <a:r>
-              <a:rPr lang="en-US" sz="1000" dirty="0">
+            <a:off x="502920" y="11750040"/>
+            <a:ext cx="4114800" cy="256032"/>
+          </a:xfrm>
+          <a:prstGeom prst="rect">
+            <a:avLst/>
+          </a:prstGeom>
+          <a:noFill/>
+          <a:ln/>
+        </p:spPr>
+        <p:txBody>
+          <a:bodyPr wrap="square" lIns="0" tIns="0" rIns="0" bIns="0" rtlCol="0" anchor="ctr"/>
+          <a:lstStyle/>
+          <a:p>
+            <a:pPr algn="l" indent="0" marL="0">
+              <a:buNone/>
+            </a:pPr>
+            <a:r>
+              <a:rPr lang="en-US" sz="800" spc="50" kern="0" dirty="0">
                 <a:solidFill>
                   <a:srgbClr val="6E6E6E"/>
                 </a:solidFill>
@@ -3479,48 +3427,9 @@
                 <a:ea typeface="Arial" pitchFamily="34" charset="-122"/>
                 <a:cs typeface="Arial" pitchFamily="34" charset="-120"/>
               </a:rPr>
-              <a:t>03</a:t>
-            </a:r>
-            <a:endParaRPr lang="en-US" sz="1000" dirty="0"/>
-          </a:p>
-        </p:txBody>
-      </p:sp>
-      <p:sp>
-        <p:nvSpPr>
-          <p:cNvPr id="24" name="Text 22"/>
-          <p:cNvSpPr/>
-          <p:nvPr/>
-        </p:nvSpPr>
-        <p:spPr>
-          <a:xfrm>
-            <a:off x="457200" y="6400800"/>
-            <a:ext cx="5486400" cy="274320"/>
-          </a:xfrm>
-          <a:prstGeom prst="rect">
-            <a:avLst/>
-          </a:prstGeom>
-          <a:noFill/>
-          <a:ln/>
-        </p:spPr>
-        <p:txBody>
-          <a:bodyPr wrap="square" lIns="0" tIns="0" rIns="0" bIns="0" rtlCol="0" anchor="ctr"/>
-          <a:lstStyle/>
-          <a:p>
-            <a:pPr algn="l" indent="0" marL="0">
-              <a:buNone/>
-            </a:pPr>
-            <a:r>
-              <a:rPr lang="en-US" sz="900" spc="100" kern="0" dirty="0">
-                <a:solidFill>
-                  <a:srgbClr val="6E6E6E"/>
-                </a:solidFill>
-                <a:latin typeface="Arial" pitchFamily="34" charset="0"/>
-                <a:ea typeface="Arial" pitchFamily="34" charset="-122"/>
-                <a:cs typeface="Arial" pitchFamily="34" charset="-120"/>
-              </a:rPr>
               <a:t>TONY IMPORTADOS × MARCO</a:t>
             </a:r>
-            <a:endParaRPr lang="en-US" sz="900" dirty="0"/>
+            <a:endParaRPr lang="en-US" sz="800" dirty="0"/>
           </a:p>
         </p:txBody>
       </p:sp>
@@ -3557,24 +3466,24 @@
         </p:nvSpPr>
         <p:spPr>
           <a:xfrm>
-            <a:off x="640080" y="502920"/>
-            <a:ext cx="9144000" cy="320040"/>
-          </a:xfrm>
-          <a:prstGeom prst="rect">
-            <a:avLst/>
-          </a:prstGeom>
-          <a:noFill/>
-          <a:ln/>
-        </p:spPr>
-        <p:txBody>
-          <a:bodyPr wrap="square" lIns="0" tIns="0" rIns="0" bIns="0" rtlCol="0" anchor="ctr"/>
-          <a:lstStyle/>
-          <a:p>
-            <a:pPr indent="0" marL="0">
-              <a:buNone/>
-            </a:pPr>
-            <a:r>
-              <a:rPr lang="en-US" sz="1300" b="1" spc="200" kern="0" dirty="0">
+            <a:off x="502920" y="548640"/>
+            <a:ext cx="5852160" cy="292608"/>
+          </a:xfrm>
+          <a:prstGeom prst="rect">
+            <a:avLst/>
+          </a:prstGeom>
+          <a:noFill/>
+          <a:ln/>
+        </p:spPr>
+        <p:txBody>
+          <a:bodyPr wrap="square" lIns="0" tIns="0" rIns="0" bIns="0" rtlCol="0" anchor="ctr"/>
+          <a:lstStyle/>
+          <a:p>
+            <a:pPr indent="0" marL="0">
+              <a:buNone/>
+            </a:pPr>
+            <a:r>
+              <a:rPr lang="en-US" sz="1200" b="1" spc="180" kern="0" dirty="0">
                 <a:solidFill>
                   <a:srgbClr val="00A8FF"/>
                 </a:solidFill>
@@ -3584,7 +3493,7 @@
               </a:rPr>
               <a:t>CÓMO FUNCIONA UN DROP</a:t>
             </a:r>
-            <a:endParaRPr lang="en-US" sz="1300" dirty="0"/>
+            <a:endParaRPr lang="en-US" sz="1200" dirty="0"/>
           </a:p>
         </p:txBody>
       </p:sp>
@@ -3596,8 +3505,8 @@
         </p:nvSpPr>
         <p:spPr>
           <a:xfrm>
-            <a:off x="640080" y="777240"/>
-            <a:ext cx="10881360" cy="1188720"/>
+            <a:off x="502920" y="914400"/>
+            <a:ext cx="5852160" cy="1417320"/>
           </a:xfrm>
           <a:prstGeom prst="rect">
             <a:avLst/>
@@ -3611,12 +3520,12 @@
           <a:p>
             <a:pPr indent="0" marL="0">
               <a:lnSpc>
-                <a:spcPct val="100000"/>
+                <a:spcPct val="103000"/>
               </a:lnSpc>
               <a:buNone/>
             </a:pPr>
             <a:r>
-              <a:rPr lang="en-US" sz="3000" b="1" dirty="0">
+              <a:rPr lang="en-US" sz="2600" b="1" dirty="0">
                 <a:solidFill>
                   <a:srgbClr val="FFFFFF"/>
                 </a:solidFill>
@@ -3626,7 +3535,7 @@
               </a:rPr>
               <a:t>12 a 24 horas. Stock limitado. No se repite.</a:t>
             </a:r>
-            <a:endParaRPr lang="en-US" sz="3000" dirty="0"/>
+            <a:endParaRPr lang="en-US" sz="2600" dirty="0"/>
           </a:p>
         </p:txBody>
       </p:sp>
@@ -3638,12 +3547,12 @@
         </p:nvSpPr>
         <p:spPr>
           <a:xfrm>
-            <a:off x="640080" y="2194560"/>
-            <a:ext cx="2624328" cy="2377440"/>
+            <a:off x="502920" y="2606040"/>
+            <a:ext cx="5852160" cy="1280160"/>
           </a:xfrm>
           <a:prstGeom prst="roundRect">
             <a:avLst>
-              <a:gd name="adj" fmla="val 3462"/>
+              <a:gd name="adj" fmla="val 6429"/>
             </a:avLst>
           </a:prstGeom>
           <a:solidFill>
@@ -3667,8 +3576,8 @@
         </p:nvSpPr>
         <p:spPr>
           <a:xfrm>
-            <a:off x="868680" y="2423160"/>
-            <a:ext cx="457200" cy="457200"/>
+            <a:off x="758952" y="2862072"/>
+            <a:ext cx="502920" cy="502920"/>
           </a:xfrm>
           <a:prstGeom prst="ellipse">
             <a:avLst/>
@@ -3687,8 +3596,8 @@
         </p:nvSpPr>
         <p:spPr>
           <a:xfrm>
-            <a:off x="868680" y="2423160"/>
-            <a:ext cx="457200" cy="457200"/>
+            <a:off x="758952" y="2862072"/>
+            <a:ext cx="502920" cy="502920"/>
           </a:xfrm>
           <a:prstGeom prst="rect">
             <a:avLst/>
@@ -3704,7 +3613,7 @@
               <a:buNone/>
             </a:pPr>
             <a:r>
-              <a:rPr lang="en-US" sz="1800" b="1" dirty="0">
+              <a:rPr lang="en-US" sz="1900" b="1" dirty="0">
                 <a:solidFill>
                   <a:srgbClr val="0D0D0D"/>
                 </a:solidFill>
@@ -3714,7 +3623,7 @@
               </a:rPr>
               <a:t>1</a:t>
             </a:r>
-            <a:endParaRPr lang="en-US" sz="1800" dirty="0"/>
+            <a:endParaRPr lang="en-US" sz="1900" dirty="0"/>
           </a:p>
         </p:txBody>
       </p:sp>
@@ -3726,24 +3635,24 @@
         </p:nvSpPr>
         <p:spPr>
           <a:xfrm>
-            <a:off x="868680" y="3063240"/>
-            <a:ext cx="2194560" cy="365760"/>
-          </a:xfrm>
-          <a:prstGeom prst="rect">
-            <a:avLst/>
-          </a:prstGeom>
-          <a:noFill/>
-          <a:ln/>
-        </p:spPr>
-        <p:txBody>
-          <a:bodyPr wrap="square" lIns="0" tIns="0" rIns="0" bIns="0" rtlCol="0" anchor="ctr"/>
-          <a:lstStyle/>
-          <a:p>
-            <a:pPr indent="0" marL="0">
-              <a:buNone/>
-            </a:pPr>
-            <a:r>
-              <a:rPr lang="en-US" sz="1500" b="1" dirty="0">
+            <a:off x="1463040" y="2825496"/>
+            <a:ext cx="4617720" cy="365760"/>
+          </a:xfrm>
+          <a:prstGeom prst="rect">
+            <a:avLst/>
+          </a:prstGeom>
+          <a:noFill/>
+          <a:ln/>
+        </p:spPr>
+        <p:txBody>
+          <a:bodyPr wrap="square" lIns="0" tIns="0" rIns="0" bIns="0" rtlCol="0" anchor="ctr"/>
+          <a:lstStyle/>
+          <a:p>
+            <a:pPr indent="0" marL="0">
+              <a:buNone/>
+            </a:pPr>
+            <a:r>
+              <a:rPr lang="en-US" sz="1550" b="1" dirty="0">
                 <a:solidFill>
                   <a:srgbClr val="FFFFFF"/>
                 </a:solidFill>
@@ -3753,7 +3662,7 @@
               </a:rPr>
               <a:t>Teaser</a:t>
             </a:r>
-            <a:endParaRPr lang="en-US" sz="1500" dirty="0"/>
+            <a:endParaRPr lang="en-US" sz="1550" dirty="0"/>
           </a:p>
         </p:txBody>
       </p:sp>
@@ -3765,8 +3674,8 @@
         </p:nvSpPr>
         <p:spPr>
           <a:xfrm>
-            <a:off x="868680" y="3456432"/>
-            <a:ext cx="2194560" cy="1005840"/>
+            <a:off x="1463040" y="3172968"/>
+            <a:ext cx="4617720" cy="594360"/>
           </a:xfrm>
           <a:prstGeom prst="rect">
             <a:avLst/>
@@ -3785,7 +3694,7 @@
               <a:buNone/>
             </a:pPr>
             <a:r>
-              <a:rPr lang="en-US" sz="1050" dirty="0">
+              <a:rPr lang="en-US" sz="1100" dirty="0">
                 <a:solidFill>
                   <a:srgbClr val="9A9A9A"/>
                 </a:solidFill>
@@ -3795,7 +3704,7 @@
               </a:rPr>
               <a:t>Se anuncia que se viene un Drop nuevo.</a:t>
             </a:r>
-            <a:endParaRPr lang="en-US" sz="1050" dirty="0"/>
+            <a:endParaRPr lang="en-US" sz="1100" dirty="0"/>
           </a:p>
         </p:txBody>
       </p:sp>
@@ -3807,12 +3716,12 @@
         </p:nvSpPr>
         <p:spPr>
           <a:xfrm>
-            <a:off x="3465576" y="2194560"/>
-            <a:ext cx="2624328" cy="2377440"/>
+            <a:off x="502920" y="4050792"/>
+            <a:ext cx="5852160" cy="1280160"/>
           </a:xfrm>
           <a:prstGeom prst="roundRect">
             <a:avLst>
-              <a:gd name="adj" fmla="val 3462"/>
+              <a:gd name="adj" fmla="val 6429"/>
             </a:avLst>
           </a:prstGeom>
           <a:solidFill>
@@ -3836,8 +3745,8 @@
         </p:nvSpPr>
         <p:spPr>
           <a:xfrm>
-            <a:off x="3694176" y="2423160"/>
-            <a:ext cx="457200" cy="457200"/>
+            <a:off x="758952" y="4306824"/>
+            <a:ext cx="502920" cy="502920"/>
           </a:xfrm>
           <a:prstGeom prst="ellipse">
             <a:avLst/>
@@ -3856,8 +3765,8 @@
         </p:nvSpPr>
         <p:spPr>
           <a:xfrm>
-            <a:off x="3694176" y="2423160"/>
-            <a:ext cx="457200" cy="457200"/>
+            <a:off x="758952" y="4306824"/>
+            <a:ext cx="502920" cy="502920"/>
           </a:xfrm>
           <a:prstGeom prst="rect">
             <a:avLst/>
@@ -3873,7 +3782,7 @@
               <a:buNone/>
             </a:pPr>
             <a:r>
-              <a:rPr lang="en-US" sz="1800" b="1" dirty="0">
+              <a:rPr lang="en-US" sz="1900" b="1" dirty="0">
                 <a:solidFill>
                   <a:srgbClr val="0D0D0D"/>
                 </a:solidFill>
@@ -3883,7 +3792,7 @@
               </a:rPr>
               <a:t>2</a:t>
             </a:r>
-            <a:endParaRPr lang="en-US" sz="1800" dirty="0"/>
+            <a:endParaRPr lang="en-US" sz="1900" dirty="0"/>
           </a:p>
         </p:txBody>
       </p:sp>
@@ -3895,24 +3804,24 @@
         </p:nvSpPr>
         <p:spPr>
           <a:xfrm>
-            <a:off x="3694176" y="3063240"/>
-            <a:ext cx="2194560" cy="365760"/>
-          </a:xfrm>
-          <a:prstGeom prst="rect">
-            <a:avLst/>
-          </a:prstGeom>
-          <a:noFill/>
-          <a:ln/>
-        </p:spPr>
-        <p:txBody>
-          <a:bodyPr wrap="square" lIns="0" tIns="0" rIns="0" bIns="0" rtlCol="0" anchor="ctr"/>
-          <a:lstStyle/>
-          <a:p>
-            <a:pPr indent="0" marL="0">
-              <a:buNone/>
-            </a:pPr>
-            <a:r>
-              <a:rPr lang="en-US" sz="1500" b="1" dirty="0">
+            <a:off x="1463040" y="4270248"/>
+            <a:ext cx="4617720" cy="365760"/>
+          </a:xfrm>
+          <a:prstGeom prst="rect">
+            <a:avLst/>
+          </a:prstGeom>
+          <a:noFill/>
+          <a:ln/>
+        </p:spPr>
+        <p:txBody>
+          <a:bodyPr wrap="square" lIns="0" tIns="0" rIns="0" bIns="0" rtlCol="0" anchor="ctr"/>
+          <a:lstStyle/>
+          <a:p>
+            <a:pPr indent="0" marL="0">
+              <a:buNone/>
+            </a:pPr>
+            <a:r>
+              <a:rPr lang="en-US" sz="1550" b="1" dirty="0">
                 <a:solidFill>
                   <a:srgbClr val="FFFFFF"/>
                 </a:solidFill>
@@ -3922,7 +3831,7 @@
               </a:rPr>
               <a:t>Abre</a:t>
             </a:r>
-            <a:endParaRPr lang="en-US" sz="1500" dirty="0"/>
+            <a:endParaRPr lang="en-US" sz="1550" dirty="0"/>
           </a:p>
         </p:txBody>
       </p:sp>
@@ -3934,8 +3843,8 @@
         </p:nvSpPr>
         <p:spPr>
           <a:xfrm>
-            <a:off x="3694176" y="3456432"/>
-            <a:ext cx="2194560" cy="1005840"/>
+            <a:off x="1463040" y="4617720"/>
+            <a:ext cx="4617720" cy="594360"/>
           </a:xfrm>
           <a:prstGeom prst="rect">
             <a:avLst/>
@@ -3954,7 +3863,7 @@
               <a:buNone/>
             </a:pPr>
             <a:r>
-              <a:rPr lang="en-US" sz="1050" dirty="0">
+              <a:rPr lang="en-US" sz="1100" dirty="0">
                 <a:solidFill>
                   <a:srgbClr val="9A9A9A"/>
                 </a:solidFill>
@@ -3964,7 +3873,7 @@
               </a:rPr>
               <a:t>Cuenta regresiva y stock visibles en tiempo real.</a:t>
             </a:r>
-            <a:endParaRPr lang="en-US" sz="1050" dirty="0"/>
+            <a:endParaRPr lang="en-US" sz="1100" dirty="0"/>
           </a:p>
         </p:txBody>
       </p:sp>
@@ -3976,12 +3885,12 @@
         </p:nvSpPr>
         <p:spPr>
           <a:xfrm>
-            <a:off x="6291072" y="2194560"/>
-            <a:ext cx="2624328" cy="2377440"/>
+            <a:off x="502920" y="5495544"/>
+            <a:ext cx="5852160" cy="1280160"/>
           </a:xfrm>
           <a:prstGeom prst="roundRect">
             <a:avLst>
-              <a:gd name="adj" fmla="val 3462"/>
+              <a:gd name="adj" fmla="val 6429"/>
             </a:avLst>
           </a:prstGeom>
           <a:solidFill>
@@ -4005,8 +3914,8 @@
         </p:nvSpPr>
         <p:spPr>
           <a:xfrm>
-            <a:off x="6519672" y="2423160"/>
-            <a:ext cx="457200" cy="457200"/>
+            <a:off x="758952" y="5751576"/>
+            <a:ext cx="502920" cy="502920"/>
           </a:xfrm>
           <a:prstGeom prst="ellipse">
             <a:avLst/>
@@ -4025,8 +3934,8 @@
         </p:nvSpPr>
         <p:spPr>
           <a:xfrm>
-            <a:off x="6519672" y="2423160"/>
-            <a:ext cx="457200" cy="457200"/>
+            <a:off x="758952" y="5751576"/>
+            <a:ext cx="502920" cy="502920"/>
           </a:xfrm>
           <a:prstGeom prst="rect">
             <a:avLst/>
@@ -4042,7 +3951,7 @@
               <a:buNone/>
             </a:pPr>
             <a:r>
-              <a:rPr lang="en-US" sz="1800" b="1" dirty="0">
+              <a:rPr lang="en-US" sz="1900" b="1" dirty="0">
                 <a:solidFill>
                   <a:srgbClr val="0D0D0D"/>
                 </a:solidFill>
@@ -4052,7 +3961,7 @@
               </a:rPr>
               <a:t>3</a:t>
             </a:r>
-            <a:endParaRPr lang="en-US" sz="1800" dirty="0"/>
+            <a:endParaRPr lang="en-US" sz="1900" dirty="0"/>
           </a:p>
         </p:txBody>
       </p:sp>
@@ -4064,24 +3973,24 @@
         </p:nvSpPr>
         <p:spPr>
           <a:xfrm>
-            <a:off x="6519672" y="3063240"/>
-            <a:ext cx="2194560" cy="365760"/>
-          </a:xfrm>
-          <a:prstGeom prst="rect">
-            <a:avLst/>
-          </a:prstGeom>
-          <a:noFill/>
-          <a:ln/>
-        </p:spPr>
-        <p:txBody>
-          <a:bodyPr wrap="square" lIns="0" tIns="0" rIns="0" bIns="0" rtlCol="0" anchor="ctr"/>
-          <a:lstStyle/>
-          <a:p>
-            <a:pPr indent="0" marL="0">
-              <a:buNone/>
-            </a:pPr>
-            <a:r>
-              <a:rPr lang="en-US" sz="1500" b="1" dirty="0">
+            <a:off x="1463040" y="5715000"/>
+            <a:ext cx="4617720" cy="365760"/>
+          </a:xfrm>
+          <a:prstGeom prst="rect">
+            <a:avLst/>
+          </a:prstGeom>
+          <a:noFill/>
+          <a:ln/>
+        </p:spPr>
+        <p:txBody>
+          <a:bodyPr wrap="square" lIns="0" tIns="0" rIns="0" bIns="0" rtlCol="0" anchor="ctr"/>
+          <a:lstStyle/>
+          <a:p>
+            <a:pPr indent="0" marL="0">
+              <a:buNone/>
+            </a:pPr>
+            <a:r>
+              <a:rPr lang="en-US" sz="1550" b="1" dirty="0">
                 <a:solidFill>
                   <a:srgbClr val="FFFFFF"/>
                 </a:solidFill>
@@ -4091,7 +4000,7 @@
               </a:rPr>
               <a:t>Se vende</a:t>
             </a:r>
-            <a:endParaRPr lang="en-US" sz="1500" dirty="0"/>
+            <a:endParaRPr lang="en-US" sz="1550" dirty="0"/>
           </a:p>
         </p:txBody>
       </p:sp>
@@ -4103,8 +4012,8 @@
         </p:nvSpPr>
         <p:spPr>
           <a:xfrm>
-            <a:off x="6519672" y="3456432"/>
-            <a:ext cx="2194560" cy="1005840"/>
+            <a:off x="1463040" y="6062472"/>
+            <a:ext cx="4617720" cy="594360"/>
           </a:xfrm>
           <a:prstGeom prst="rect">
             <a:avLst/>
@@ -4123,7 +4032,7 @@
               <a:buNone/>
             </a:pPr>
             <a:r>
-              <a:rPr lang="en-US" sz="1050" dirty="0">
+              <a:rPr lang="en-US" sz="1100" dirty="0">
                 <a:solidFill>
                   <a:srgbClr val="9A9A9A"/>
                 </a:solidFill>
@@ -4133,7 +4042,7 @@
               </a:rPr>
               <a:t>Combos armados, no prendas sueltas.</a:t>
             </a:r>
-            <a:endParaRPr lang="en-US" sz="1050" dirty="0"/>
+            <a:endParaRPr lang="en-US" sz="1100" dirty="0"/>
           </a:p>
         </p:txBody>
       </p:sp>
@@ -4145,12 +4054,12 @@
         </p:nvSpPr>
         <p:spPr>
           <a:xfrm>
-            <a:off x="9116568" y="2194560"/>
-            <a:ext cx="2624328" cy="2377440"/>
+            <a:off x="502920" y="6940296"/>
+            <a:ext cx="5852160" cy="1280160"/>
           </a:xfrm>
           <a:prstGeom prst="roundRect">
             <a:avLst>
-              <a:gd name="adj" fmla="val 3462"/>
+              <a:gd name="adj" fmla="val 6429"/>
             </a:avLst>
           </a:prstGeom>
           <a:solidFill>
@@ -4174,8 +4083,8 @@
         </p:nvSpPr>
         <p:spPr>
           <a:xfrm>
-            <a:off x="9345168" y="2423160"/>
-            <a:ext cx="457200" cy="457200"/>
+            <a:off x="758952" y="7196328"/>
+            <a:ext cx="502920" cy="502920"/>
           </a:xfrm>
           <a:prstGeom prst="ellipse">
             <a:avLst/>
@@ -4194,8 +4103,8 @@
         </p:nvSpPr>
         <p:spPr>
           <a:xfrm>
-            <a:off x="9345168" y="2423160"/>
-            <a:ext cx="457200" cy="457200"/>
+            <a:off x="758952" y="7196328"/>
+            <a:ext cx="502920" cy="502920"/>
           </a:xfrm>
           <a:prstGeom prst="rect">
             <a:avLst/>
@@ -4211,7 +4120,7 @@
               <a:buNone/>
             </a:pPr>
             <a:r>
-              <a:rPr lang="en-US" sz="1800" b="1" dirty="0">
+              <a:rPr lang="en-US" sz="1900" b="1" dirty="0">
                 <a:solidFill>
                   <a:srgbClr val="0D0D0D"/>
                 </a:solidFill>
@@ -4221,7 +4130,7 @@
               </a:rPr>
               <a:t>4</a:t>
             </a:r>
-            <a:endParaRPr lang="en-US" sz="1800" dirty="0"/>
+            <a:endParaRPr lang="en-US" sz="1900" dirty="0"/>
           </a:p>
         </p:txBody>
       </p:sp>
@@ -4233,24 +4142,24 @@
         </p:nvSpPr>
         <p:spPr>
           <a:xfrm>
-            <a:off x="9345168" y="3063240"/>
-            <a:ext cx="2194560" cy="365760"/>
-          </a:xfrm>
-          <a:prstGeom prst="rect">
-            <a:avLst/>
-          </a:prstGeom>
-          <a:noFill/>
-          <a:ln/>
-        </p:spPr>
-        <p:txBody>
-          <a:bodyPr wrap="square" lIns="0" tIns="0" rIns="0" bIns="0" rtlCol="0" anchor="ctr"/>
-          <a:lstStyle/>
-          <a:p>
-            <a:pPr indent="0" marL="0">
-              <a:buNone/>
-            </a:pPr>
-            <a:r>
-              <a:rPr lang="en-US" sz="1500" b="1" dirty="0">
+            <a:off x="1463040" y="7159752"/>
+            <a:ext cx="4617720" cy="365760"/>
+          </a:xfrm>
+          <a:prstGeom prst="rect">
+            <a:avLst/>
+          </a:prstGeom>
+          <a:noFill/>
+          <a:ln/>
+        </p:spPr>
+        <p:txBody>
+          <a:bodyPr wrap="square" lIns="0" tIns="0" rIns="0" bIns="0" rtlCol="0" anchor="ctr"/>
+          <a:lstStyle/>
+          <a:p>
+            <a:pPr indent="0" marL="0">
+              <a:buNone/>
+            </a:pPr>
+            <a:r>
+              <a:rPr lang="en-US" sz="1550" b="1" dirty="0">
                 <a:solidFill>
                   <a:srgbClr val="FFFFFF"/>
                 </a:solidFill>
@@ -4260,7 +4169,7 @@
               </a:rPr>
               <a:t>Se cierra</a:t>
             </a:r>
-            <a:endParaRPr lang="en-US" sz="1500" dirty="0"/>
+            <a:endParaRPr lang="en-US" sz="1550" dirty="0"/>
           </a:p>
         </p:txBody>
       </p:sp>
@@ -4272,8 +4181,8 @@
         </p:nvSpPr>
         <p:spPr>
           <a:xfrm>
-            <a:off x="9345168" y="3456432"/>
-            <a:ext cx="2194560" cy="1005840"/>
+            <a:off x="1463040" y="7507224"/>
+            <a:ext cx="4617720" cy="594360"/>
           </a:xfrm>
           <a:prstGeom prst="rect">
             <a:avLst/>
@@ -4292,7 +4201,7 @@
               <a:buNone/>
             </a:pPr>
             <a:r>
-              <a:rPr lang="en-US" sz="1050" dirty="0">
+              <a:rPr lang="en-US" sz="1100" dirty="0">
                 <a:solidFill>
                   <a:srgbClr val="9A9A9A"/>
                 </a:solidFill>
@@ -4302,7 +4211,7 @@
               </a:rPr>
               <a:t>Llega a cero o se acaba el tiempo — no se extiende.</a:t>
             </a:r>
-            <a:endParaRPr lang="en-US" sz="1050" dirty="0"/>
+            <a:endParaRPr lang="en-US" sz="1100" dirty="0"/>
           </a:p>
         </p:txBody>
       </p:sp>
@@ -4314,12 +4223,12 @@
         </p:nvSpPr>
         <p:spPr>
           <a:xfrm>
-            <a:off x="640080" y="4846320"/>
-            <a:ext cx="10908792" cy="1371600"/>
+            <a:off x="502920" y="8476488"/>
+            <a:ext cx="5852160" cy="1691640"/>
           </a:xfrm>
           <a:prstGeom prst="roundRect">
             <a:avLst>
-              <a:gd name="adj" fmla="val 6000"/>
+              <a:gd name="adj" fmla="val 4865"/>
             </a:avLst>
           </a:prstGeom>
           <a:solidFill>
@@ -4343,20 +4252,23 @@
         </p:nvSpPr>
         <p:spPr>
           <a:xfrm>
-            <a:off x="914400" y="5029200"/>
-            <a:ext cx="10332720" cy="320040"/>
-          </a:xfrm>
-          <a:prstGeom prst="rect">
-            <a:avLst/>
-          </a:prstGeom>
-          <a:noFill/>
-          <a:ln/>
-        </p:spPr>
-        <p:txBody>
-          <a:bodyPr wrap="square" lIns="0" tIns="0" rIns="0" bIns="0" rtlCol="0" anchor="ctr"/>
-          <a:lstStyle/>
-          <a:p>
-            <a:pPr indent="0" marL="0">
+            <a:off x="777240" y="8705088"/>
+            <a:ext cx="5303520" cy="502920"/>
+          </a:xfrm>
+          <a:prstGeom prst="rect">
+            <a:avLst/>
+          </a:prstGeom>
+          <a:noFill/>
+          <a:ln/>
+        </p:spPr>
+        <p:txBody>
+          <a:bodyPr wrap="square" lIns="0" tIns="0" rIns="0" bIns="0" rtlCol="0" anchor="ctr"/>
+          <a:lstStyle/>
+          <a:p>
+            <a:pPr indent="0" marL="0">
+              <a:lnSpc>
+                <a:spcPct val="115000"/>
+              </a:lnSpc>
               <a:buNone/>
             </a:pPr>
             <a:r>
@@ -4368,7 +4280,7 @@
                 <a:ea typeface="Arial" pitchFamily="34" charset="-122"/>
                 <a:cs typeface="Arial" pitchFamily="34" charset="-120"/>
               </a:rPr>
-              <a:t>Tu rol en esto no es leer un guion de venta</a:t>
+              <a:t>Tu rol acá no es leer un guion de venta</a:t>
             </a:r>
             <a:endParaRPr lang="en-US" sz="1400" dirty="0"/>
           </a:p>
@@ -4382,8 +4294,8 @@
         </p:nvSpPr>
         <p:spPr>
           <a:xfrm>
-            <a:off x="914400" y="5367528"/>
-            <a:ext cx="10332720" cy="731520"/>
+            <a:off x="777240" y="9253728"/>
+            <a:ext cx="5303520" cy="822960"/>
           </a:xfrm>
           <a:prstGeom prst="rect">
             <a:avLst/>
@@ -4402,7 +4314,7 @@
               <a:buNone/>
             </a:pPr>
             <a:r>
-              <a:rPr lang="en-US" sz="1250" dirty="0">
+              <a:rPr lang="en-US" sz="1150" dirty="0">
                 <a:solidFill>
                   <a:srgbClr val="9A9A9A"/>
                 </a:solidFill>
@@ -4410,9 +4322,9 @@
                 <a:ea typeface="Arial" pitchFamily="34" charset="-122"/>
                 <a:cs typeface="Arial" pitchFamily="34" charset="-120"/>
               </a:rPr>
-              <a:t>Es mostrar el Drop como algo que pasa de verdad — con la misma actitud con la que ya mostrás tu día a día. La urgencia es real: cuando se agota, se agota.</a:t>
-            </a:r>
-            <a:endParaRPr lang="en-US" sz="1250" dirty="0"/>
+              <a:t>Es mostrar el Drop como algo que pasa de verdad, con la misma actitud con la que ya mostrás tu día a día. La urgencia es real: cuando se agota, se agota.</a:t>
+            </a:r>
+            <a:endParaRPr lang="en-US" sz="1150" dirty="0"/>
           </a:p>
         </p:txBody>
       </p:sp>
@@ -4424,8 +4336,8 @@
         </p:nvSpPr>
         <p:spPr>
           <a:xfrm>
-            <a:off x="11365992" y="6400800"/>
-            <a:ext cx="548640" cy="274320"/>
+            <a:off x="5989320" y="11750040"/>
+            <a:ext cx="457200" cy="256032"/>
           </a:xfrm>
           <a:prstGeom prst="rect">
             <a:avLst/>
@@ -4441,7 +4353,7 @@
               <a:buNone/>
             </a:pPr>
             <a:r>
-              <a:rPr lang="en-US" sz="1000" dirty="0">
+              <a:rPr lang="en-US" sz="900" dirty="0">
                 <a:solidFill>
                   <a:srgbClr val="6E6E6E"/>
                 </a:solidFill>
@@ -4451,7 +4363,7 @@
               </a:rPr>
               <a:t>04</a:t>
             </a:r>
-            <a:endParaRPr lang="en-US" sz="1000" dirty="0"/>
+            <a:endParaRPr lang="en-US" sz="900" dirty="0"/>
           </a:p>
         </p:txBody>
       </p:sp>
@@ -4463,8 +4375,8 @@
         </p:nvSpPr>
         <p:spPr>
           <a:xfrm>
-            <a:off x="457200" y="6400800"/>
-            <a:ext cx="5486400" cy="274320"/>
+            <a:off x="502920" y="11750040"/>
+            <a:ext cx="4114800" cy="256032"/>
           </a:xfrm>
           <a:prstGeom prst="rect">
             <a:avLst/>
@@ -4480,7 +4392,7 @@
               <a:buNone/>
             </a:pPr>
             <a:r>
-              <a:rPr lang="en-US" sz="900" spc="100" kern="0" dirty="0">
+              <a:rPr lang="en-US" sz="800" spc="50" kern="0" dirty="0">
                 <a:solidFill>
                   <a:srgbClr val="6E6E6E"/>
                 </a:solidFill>
@@ -4490,7 +4402,7 @@
               </a:rPr>
               <a:t>TONY IMPORTADOS × MARCO</a:t>
             </a:r>
-            <a:endParaRPr lang="en-US" sz="900" dirty="0"/>
+            <a:endParaRPr lang="en-US" sz="800" dirty="0"/>
           </a:p>
         </p:txBody>
       </p:sp>
@@ -4527,24 +4439,24 @@
         </p:nvSpPr>
         <p:spPr>
           <a:xfrm>
-            <a:off x="640080" y="502920"/>
-            <a:ext cx="9144000" cy="320040"/>
-          </a:xfrm>
-          <a:prstGeom prst="rect">
-            <a:avLst/>
-          </a:prstGeom>
-          <a:noFill/>
-          <a:ln/>
-        </p:spPr>
-        <p:txBody>
-          <a:bodyPr wrap="square" lIns="0" tIns="0" rIns="0" bIns="0" rtlCol="0" anchor="ctr"/>
-          <a:lstStyle/>
-          <a:p>
-            <a:pPr indent="0" marL="0">
-              <a:buNone/>
-            </a:pPr>
-            <a:r>
-              <a:rPr lang="en-US" sz="1300" b="1" spc="200" kern="0" dirty="0">
+            <a:off x="502920" y="548640"/>
+            <a:ext cx="5852160" cy="292608"/>
+          </a:xfrm>
+          <a:prstGeom prst="rect">
+            <a:avLst/>
+          </a:prstGeom>
+          <a:noFill/>
+          <a:ln/>
+        </p:spPr>
+        <p:txBody>
+          <a:bodyPr wrap="square" lIns="0" tIns="0" rIns="0" bIns="0" rtlCol="0" anchor="ctr"/>
+          <a:lstStyle/>
+          <a:p>
+            <a:pPr indent="0" marL="0">
+              <a:buNone/>
+            </a:pPr>
+            <a:r>
+              <a:rPr lang="en-US" sz="1200" b="1" spc="180" kern="0" dirty="0">
                 <a:solidFill>
                   <a:srgbClr val="FF1E1E"/>
                 </a:solidFill>
@@ -4554,7 +4466,7 @@
               </a:rPr>
               <a:t>TU ROL PROPUESTO</a:t>
             </a:r>
-            <a:endParaRPr lang="en-US" sz="1300" dirty="0"/>
+            <a:endParaRPr lang="en-US" sz="1200" dirty="0"/>
           </a:p>
         </p:txBody>
       </p:sp>
@@ -4566,8 +4478,8 @@
         </p:nvSpPr>
         <p:spPr>
           <a:xfrm>
-            <a:off x="640080" y="777240"/>
-            <a:ext cx="10881360" cy="1188720"/>
+            <a:off x="502920" y="914400"/>
+            <a:ext cx="5852160" cy="1417320"/>
           </a:xfrm>
           <a:prstGeom prst="rect">
             <a:avLst/>
@@ -4581,12 +4493,12 @@
           <a:p>
             <a:pPr indent="0" marL="0">
               <a:lnSpc>
-                <a:spcPct val="100000"/>
+                <a:spcPct val="103000"/>
               </a:lnSpc>
               <a:buNone/>
             </a:pPr>
             <a:r>
-              <a:rPr lang="en-US" sz="3000" b="1" dirty="0">
+              <a:rPr lang="en-US" sz="2600" b="1" dirty="0">
                 <a:solidFill>
                   <a:srgbClr val="FFFFFF"/>
                 </a:solidFill>
@@ -4596,7 +4508,7 @@
               </a:rPr>
               <a:t>Tres roles, ninguno forzado</a:t>
             </a:r>
-            <a:endParaRPr lang="en-US" sz="3000" dirty="0"/>
+            <a:endParaRPr lang="en-US" sz="2600" dirty="0"/>
           </a:p>
         </p:txBody>
       </p:sp>
@@ -4608,12 +4520,12 @@
         </p:nvSpPr>
         <p:spPr>
           <a:xfrm>
-            <a:off x="640080" y="2148840"/>
-            <a:ext cx="3520440" cy="3566160"/>
+            <a:off x="502920" y="2606040"/>
+            <a:ext cx="5852160" cy="2514600"/>
           </a:xfrm>
           <a:prstGeom prst="roundRect">
             <a:avLst>
-              <a:gd name="adj" fmla="val 2338"/>
+              <a:gd name="adj" fmla="val 3273"/>
             </a:avLst>
           </a:prstGeom>
           <a:solidFill>
@@ -4637,12 +4549,12 @@
         </p:nvSpPr>
         <p:spPr>
           <a:xfrm>
-            <a:off x="914400" y="2377440"/>
-            <a:ext cx="2286000" cy="384048"/>
+            <a:off x="777240" y="2862072"/>
+            <a:ext cx="5303520" cy="411480"/>
           </a:xfrm>
           <a:prstGeom prst="roundRect">
             <a:avLst>
-              <a:gd name="adj" fmla="val 50000"/>
+              <a:gd name="adj" fmla="val 17778"/>
             </a:avLst>
           </a:prstGeom>
           <a:solidFill>
@@ -4664,24 +4576,24 @@
         </p:nvSpPr>
         <p:spPr>
           <a:xfrm>
-            <a:off x="914400" y="2377440"/>
-            <a:ext cx="2971800" cy="384048"/>
-          </a:xfrm>
-          <a:prstGeom prst="rect">
-            <a:avLst/>
-          </a:prstGeom>
-          <a:noFill/>
-          <a:ln/>
-        </p:spPr>
-        <p:txBody>
-          <a:bodyPr wrap="square" lIns="0" tIns="0" rIns="0" bIns="0" rtlCol="0" anchor="ctr"/>
-          <a:lstStyle/>
-          <a:p>
-            <a:pPr indent="0" marL="0">
-              <a:buNone/>
-            </a:pPr>
-            <a:r>
-              <a:rPr lang="en-US" sz="1250" b="1" dirty="0">
+            <a:off x="777240" y="2862072"/>
+            <a:ext cx="5303520" cy="411480"/>
+          </a:xfrm>
+          <a:prstGeom prst="rect">
+            <a:avLst/>
+          </a:prstGeom>
+          <a:noFill/>
+          <a:ln/>
+        </p:spPr>
+        <p:txBody>
+          <a:bodyPr wrap="square" lIns="0" tIns="0" rIns="0" bIns="0" rtlCol="0" anchor="ctr"/>
+          <a:lstStyle/>
+          <a:p>
+            <a:pPr algn="ctr" indent="0" marL="0">
+              <a:buNone/>
+            </a:pPr>
+            <a:r>
+              <a:rPr lang="en-US" sz="1400" b="1" dirty="0">
                 <a:solidFill>
                   <a:srgbClr val="FF1E1E"/>
                 </a:solidFill>
@@ -4691,66 +4603,66 @@
               </a:rPr>
               <a:t>Emprendedor</a:t>
             </a:r>
+            <a:endParaRPr lang="en-US" sz="1400" dirty="0"/>
+          </a:p>
+        </p:txBody>
+      </p:sp>
+      <p:sp>
+        <p:nvSpPr>
+          <p:cNvPr id="7" name="Text 5"/>
+          <p:cNvSpPr/>
+          <p:nvPr/>
+        </p:nvSpPr>
+        <p:spPr>
+          <a:xfrm>
+            <a:off x="777240" y="3474720"/>
+            <a:ext cx="5303520" cy="1463040"/>
+          </a:xfrm>
+          <a:prstGeom prst="rect">
+            <a:avLst/>
+          </a:prstGeom>
+          <a:noFill/>
+          <a:ln/>
+        </p:spPr>
+        <p:txBody>
+          <a:bodyPr wrap="square" lIns="0" tIns="0" rIns="0" bIns="0" rtlCol="0" anchor="ctr"/>
+          <a:lstStyle/>
+          <a:p>
+            <a:pPr indent="0" marL="0">
+              <a:lnSpc>
+                <a:spcPct val="132000"/>
+              </a:lnSpc>
+              <a:buNone/>
+            </a:pPr>
+            <a:r>
+              <a:rPr lang="en-US" sz="1250" dirty="0">
+                <a:solidFill>
+                  <a:srgbClr val="9A9A9A"/>
+                </a:solidFill>
+                <a:latin typeface="Arial" pitchFamily="34" charset="0"/>
+                <a:ea typeface="Arial" pitchFamily="34" charset="-122"/>
+                <a:cs typeface="Arial" pitchFamily="34" charset="-120"/>
+              </a:rPr>
+              <a:t>Contás tu propia experiencia con @kairo.stamp — lo que aprendiste armando algo desde cero.</a:t>
+            </a:r>
             <a:endParaRPr lang="en-US" sz="1250" dirty="0"/>
           </a:p>
         </p:txBody>
       </p:sp>
       <p:sp>
         <p:nvSpPr>
-          <p:cNvPr id="7" name="Text 5"/>
-          <p:cNvSpPr/>
-          <p:nvPr/>
-        </p:nvSpPr>
-        <p:spPr>
-          <a:xfrm>
-            <a:off x="914400" y="2971800"/>
-            <a:ext cx="3017520" cy="2468880"/>
-          </a:xfrm>
-          <a:prstGeom prst="rect">
-            <a:avLst/>
-          </a:prstGeom>
-          <a:noFill/>
-          <a:ln/>
-        </p:spPr>
-        <p:txBody>
-          <a:bodyPr wrap="square" lIns="0" tIns="0" rIns="0" bIns="0" rtlCol="0" anchor="ctr"/>
-          <a:lstStyle/>
-          <a:p>
-            <a:pPr indent="0" marL="0">
-              <a:lnSpc>
-                <a:spcPct val="130000"/>
-              </a:lnSpc>
-              <a:buNone/>
-            </a:pPr>
-            <a:r>
-              <a:rPr lang="en-US" sz="1250" dirty="0">
-                <a:solidFill>
-                  <a:srgbClr val="9A9A9A"/>
-                </a:solidFill>
-                <a:latin typeface="Arial" pitchFamily="34" charset="0"/>
-                <a:ea typeface="Arial" pitchFamily="34" charset="-122"/>
-                <a:cs typeface="Arial" pitchFamily="34" charset="-120"/>
-              </a:rPr>
-              <a:t>Contás tu propia experiencia con @kairo.stamp — lo que aprendiste armando algo desde cero.</a:t>
-            </a:r>
-            <a:endParaRPr lang="en-US" sz="1250" dirty="0"/>
-          </a:p>
-        </p:txBody>
-      </p:sp>
-      <p:sp>
-        <p:nvSpPr>
           <p:cNvPr id="8" name="Shape 6"/>
           <p:cNvSpPr/>
           <p:nvPr/>
         </p:nvSpPr>
         <p:spPr>
           <a:xfrm>
-            <a:off x="4343400" y="2148840"/>
-            <a:ext cx="3520440" cy="3566160"/>
+            <a:off x="502920" y="5303520"/>
+            <a:ext cx="5852160" cy="2514600"/>
           </a:xfrm>
           <a:prstGeom prst="roundRect">
             <a:avLst>
-              <a:gd name="adj" fmla="val 2338"/>
+              <a:gd name="adj" fmla="val 3273"/>
             </a:avLst>
           </a:prstGeom>
           <a:solidFill>
@@ -4774,12 +4686,12 @@
         </p:nvSpPr>
         <p:spPr>
           <a:xfrm>
-            <a:off x="4617720" y="2377440"/>
-            <a:ext cx="2286000" cy="384048"/>
+            <a:off x="777240" y="5559552"/>
+            <a:ext cx="5303520" cy="411480"/>
           </a:xfrm>
           <a:prstGeom prst="roundRect">
             <a:avLst>
-              <a:gd name="adj" fmla="val 50000"/>
+              <a:gd name="adj" fmla="val 17778"/>
             </a:avLst>
           </a:prstGeom>
           <a:solidFill>
@@ -4801,24 +4713,24 @@
         </p:nvSpPr>
         <p:spPr>
           <a:xfrm>
-            <a:off x="4617720" y="2377440"/>
-            <a:ext cx="2971800" cy="384048"/>
-          </a:xfrm>
-          <a:prstGeom prst="rect">
-            <a:avLst/>
-          </a:prstGeom>
-          <a:noFill/>
-          <a:ln/>
-        </p:spPr>
-        <p:txBody>
-          <a:bodyPr wrap="square" lIns="0" tIns="0" rIns="0" bIns="0" rtlCol="0" anchor="ctr"/>
-          <a:lstStyle/>
-          <a:p>
-            <a:pPr indent="0" marL="0">
-              <a:buNone/>
-            </a:pPr>
-            <a:r>
-              <a:rPr lang="en-US" sz="1250" b="1" dirty="0">
+            <a:off x="777240" y="5559552"/>
+            <a:ext cx="5303520" cy="411480"/>
+          </a:xfrm>
+          <a:prstGeom prst="rect">
+            <a:avLst/>
+          </a:prstGeom>
+          <a:noFill/>
+          <a:ln/>
+        </p:spPr>
+        <p:txBody>
+          <a:bodyPr wrap="square" lIns="0" tIns="0" rIns="0" bIns="0" rtlCol="0" anchor="ctr"/>
+          <a:lstStyle/>
+          <a:p>
+            <a:pPr algn="ctr" indent="0" marL="0">
+              <a:buNone/>
+            </a:pPr>
+            <a:r>
+              <a:rPr lang="en-US" sz="1400" b="1" dirty="0">
                 <a:solidFill>
                   <a:srgbClr val="FFD600"/>
                 </a:solidFill>
@@ -4828,66 +4740,66 @@
               </a:rPr>
               <a:t>Creador (fútbol / lifestyle)</a:t>
             </a:r>
+            <a:endParaRPr lang="en-US" sz="1400" dirty="0"/>
+          </a:p>
+        </p:txBody>
+      </p:sp>
+      <p:sp>
+        <p:nvSpPr>
+          <p:cNvPr id="11" name="Text 9"/>
+          <p:cNvSpPr/>
+          <p:nvPr/>
+        </p:nvSpPr>
+        <p:spPr>
+          <a:xfrm>
+            <a:off x="777240" y="6172200"/>
+            <a:ext cx="5303520" cy="1463040"/>
+          </a:xfrm>
+          <a:prstGeom prst="rect">
+            <a:avLst/>
+          </a:prstGeom>
+          <a:noFill/>
+          <a:ln/>
+        </p:spPr>
+        <p:txBody>
+          <a:bodyPr wrap="square" lIns="0" tIns="0" rIns="0" bIns="0" rtlCol="0" anchor="ctr"/>
+          <a:lstStyle/>
+          <a:p>
+            <a:pPr indent="0" marL="0">
+              <a:lnSpc>
+                <a:spcPct val="132000"/>
+              </a:lnSpc>
+              <a:buNone/>
+            </a:pPr>
+            <a:r>
+              <a:rPr lang="en-US" sz="1250" dirty="0">
+                <a:solidFill>
+                  <a:srgbClr val="9A9A9A"/>
+                </a:solidFill>
+                <a:latin typeface="Arial" pitchFamily="34" charset="0"/>
+                <a:ea typeface="Arial" pitchFamily="34" charset="-122"/>
+                <a:cs typeface="Arial" pitchFamily="34" charset="-120"/>
+              </a:rPr>
+              <a:t>Seguís haciendo lo tuyo — entrenamientos, viajes — con Tony como parte natural del contenido.</a:t>
+            </a:r>
             <a:endParaRPr lang="en-US" sz="1250" dirty="0"/>
           </a:p>
         </p:txBody>
       </p:sp>
       <p:sp>
         <p:nvSpPr>
-          <p:cNvPr id="11" name="Text 9"/>
-          <p:cNvSpPr/>
-          <p:nvPr/>
-        </p:nvSpPr>
-        <p:spPr>
-          <a:xfrm>
-            <a:off x="4617720" y="2971800"/>
-            <a:ext cx="3017520" cy="2468880"/>
-          </a:xfrm>
-          <a:prstGeom prst="rect">
-            <a:avLst/>
-          </a:prstGeom>
-          <a:noFill/>
-          <a:ln/>
-        </p:spPr>
-        <p:txBody>
-          <a:bodyPr wrap="square" lIns="0" tIns="0" rIns="0" bIns="0" rtlCol="0" anchor="ctr"/>
-          <a:lstStyle/>
-          <a:p>
-            <a:pPr indent="0" marL="0">
-              <a:lnSpc>
-                <a:spcPct val="130000"/>
-              </a:lnSpc>
-              <a:buNone/>
-            </a:pPr>
-            <a:r>
-              <a:rPr lang="en-US" sz="1250" dirty="0">
-                <a:solidFill>
-                  <a:srgbClr val="9A9A9A"/>
-                </a:solidFill>
-                <a:latin typeface="Arial" pitchFamily="34" charset="0"/>
-                <a:ea typeface="Arial" pitchFamily="34" charset="-122"/>
-                <a:cs typeface="Arial" pitchFamily="34" charset="-120"/>
-              </a:rPr>
-              <a:t>Seguís haciendo lo tuyo — entrenamientos, viajes — con Tony como parte natural del contenido.</a:t>
-            </a:r>
-            <a:endParaRPr lang="en-US" sz="1250" dirty="0"/>
-          </a:p>
-        </p:txBody>
-      </p:sp>
-      <p:sp>
-        <p:nvSpPr>
           <p:cNvPr id="12" name="Shape 10"/>
           <p:cNvSpPr/>
           <p:nvPr/>
         </p:nvSpPr>
         <p:spPr>
           <a:xfrm>
-            <a:off x="8046720" y="2148840"/>
-            <a:ext cx="3520440" cy="3566160"/>
+            <a:off x="502920" y="8001000"/>
+            <a:ext cx="5852160" cy="2514600"/>
           </a:xfrm>
           <a:prstGeom prst="roundRect">
             <a:avLst>
-              <a:gd name="adj" fmla="val 2338"/>
+              <a:gd name="adj" fmla="val 3273"/>
             </a:avLst>
           </a:prstGeom>
           <a:solidFill>
@@ -4911,12 +4823,12 @@
         </p:nvSpPr>
         <p:spPr>
           <a:xfrm>
-            <a:off x="8321040" y="2377440"/>
-            <a:ext cx="2286000" cy="384048"/>
+            <a:off x="777240" y="8257032"/>
+            <a:ext cx="5303520" cy="411480"/>
           </a:xfrm>
           <a:prstGeom prst="roundRect">
             <a:avLst>
-              <a:gd name="adj" fmla="val 50000"/>
+              <a:gd name="adj" fmla="val 17778"/>
             </a:avLst>
           </a:prstGeom>
           <a:solidFill>
@@ -4938,24 +4850,24 @@
         </p:nvSpPr>
         <p:spPr>
           <a:xfrm>
-            <a:off x="8321040" y="2377440"/>
-            <a:ext cx="2971800" cy="384048"/>
-          </a:xfrm>
-          <a:prstGeom prst="rect">
-            <a:avLst/>
-          </a:prstGeom>
-          <a:noFill/>
-          <a:ln/>
-        </p:spPr>
-        <p:txBody>
-          <a:bodyPr wrap="square" lIns="0" tIns="0" rIns="0" bIns="0" rtlCol="0" anchor="ctr"/>
-          <a:lstStyle/>
-          <a:p>
-            <a:pPr indent="0" marL="0">
-              <a:buNone/>
-            </a:pPr>
-            <a:r>
-              <a:rPr lang="en-US" sz="1250" b="1" dirty="0">
+            <a:off x="777240" y="8257032"/>
+            <a:ext cx="5303520" cy="411480"/>
+          </a:xfrm>
+          <a:prstGeom prst="rect">
+            <a:avLst/>
+          </a:prstGeom>
+          <a:noFill/>
+          <a:ln/>
+        </p:spPr>
+        <p:txBody>
+          <a:bodyPr wrap="square" lIns="0" tIns="0" rIns="0" bIns="0" rtlCol="0" anchor="ctr"/>
+          <a:lstStyle/>
+          <a:p>
+            <a:pPr algn="ctr" indent="0" marL="0">
+              <a:buNone/>
+            </a:pPr>
+            <a:r>
+              <a:rPr lang="en-US" sz="1400" b="1" dirty="0">
                 <a:solidFill>
                   <a:srgbClr val="00A8FF"/>
                 </a:solidFill>
@@ -4965,62 +4877,62 @@
               </a:rPr>
               <a:t>Host</a:t>
             </a:r>
+            <a:endParaRPr lang="en-US" sz="1400" dirty="0"/>
+          </a:p>
+        </p:txBody>
+      </p:sp>
+      <p:sp>
+        <p:nvSpPr>
+          <p:cNvPr id="15" name="Text 13"/>
+          <p:cNvSpPr/>
+          <p:nvPr/>
+        </p:nvSpPr>
+        <p:spPr>
+          <a:xfrm>
+            <a:off x="777240" y="8869680"/>
+            <a:ext cx="5303520" cy="1463040"/>
+          </a:xfrm>
+          <a:prstGeom prst="rect">
+            <a:avLst/>
+          </a:prstGeom>
+          <a:noFill/>
+          <a:ln/>
+        </p:spPr>
+        <p:txBody>
+          <a:bodyPr wrap="square" lIns="0" tIns="0" rIns="0" bIns="0" rtlCol="0" anchor="ctr"/>
+          <a:lstStyle/>
+          <a:p>
+            <a:pPr indent="0" marL="0">
+              <a:lnSpc>
+                <a:spcPct val="132000"/>
+              </a:lnSpc>
+              <a:buNone/>
+            </a:pPr>
+            <a:r>
+              <a:rPr lang="en-US" sz="1250" dirty="0">
+                <a:solidFill>
+                  <a:srgbClr val="9A9A9A"/>
+                </a:solidFill>
+                <a:latin typeface="Arial" pitchFamily="34" charset="0"/>
+                <a:ea typeface="Arial" pitchFamily="34" charset="-122"/>
+                <a:cs typeface="Arial" pitchFamily="34" charset="-120"/>
+              </a:rPr>
+              <a:t>Presentás los Drops cuando abren. Directo, sin vueltas.</a:t>
+            </a:r>
             <a:endParaRPr lang="en-US" sz="1250" dirty="0"/>
           </a:p>
         </p:txBody>
       </p:sp>
       <p:sp>
         <p:nvSpPr>
-          <p:cNvPr id="15" name="Text 13"/>
-          <p:cNvSpPr/>
-          <p:nvPr/>
-        </p:nvSpPr>
-        <p:spPr>
-          <a:xfrm>
-            <a:off x="8321040" y="2971800"/>
-            <a:ext cx="3017520" cy="2468880"/>
-          </a:xfrm>
-          <a:prstGeom prst="rect">
-            <a:avLst/>
-          </a:prstGeom>
-          <a:noFill/>
-          <a:ln/>
-        </p:spPr>
-        <p:txBody>
-          <a:bodyPr wrap="square" lIns="0" tIns="0" rIns="0" bIns="0" rtlCol="0" anchor="ctr"/>
-          <a:lstStyle/>
-          <a:p>
-            <a:pPr indent="0" marL="0">
-              <a:lnSpc>
-                <a:spcPct val="130000"/>
-              </a:lnSpc>
-              <a:buNone/>
-            </a:pPr>
-            <a:r>
-              <a:rPr lang="en-US" sz="1250" dirty="0">
-                <a:solidFill>
-                  <a:srgbClr val="9A9A9A"/>
-                </a:solidFill>
-                <a:latin typeface="Arial" pitchFamily="34" charset="0"/>
-                <a:ea typeface="Arial" pitchFamily="34" charset="-122"/>
-                <a:cs typeface="Arial" pitchFamily="34" charset="-120"/>
-              </a:rPr>
-              <a:t>Presentás los Drops cuando abren. Directo, sin vueltas.</a:t>
-            </a:r>
-            <a:endParaRPr lang="en-US" sz="1250" dirty="0"/>
-          </a:p>
-        </p:txBody>
-      </p:sp>
-      <p:sp>
-        <p:nvSpPr>
           <p:cNvPr id="16" name="Text 14"/>
           <p:cNvSpPr/>
           <p:nvPr/>
         </p:nvSpPr>
         <p:spPr>
           <a:xfrm>
-            <a:off x="11365992" y="6400800"/>
-            <a:ext cx="548640" cy="274320"/>
+            <a:off x="5989320" y="11750040"/>
+            <a:ext cx="457200" cy="256032"/>
           </a:xfrm>
           <a:prstGeom prst="rect">
             <a:avLst/>
@@ -5036,7 +4948,7 @@
               <a:buNone/>
             </a:pPr>
             <a:r>
-              <a:rPr lang="en-US" sz="1000" dirty="0">
+              <a:rPr lang="en-US" sz="900" dirty="0">
                 <a:solidFill>
                   <a:srgbClr val="6E6E6E"/>
                 </a:solidFill>
@@ -5046,7 +4958,7 @@
               </a:rPr>
               <a:t>05</a:t>
             </a:r>
-            <a:endParaRPr lang="en-US" sz="1000" dirty="0"/>
+            <a:endParaRPr lang="en-US" sz="900" dirty="0"/>
           </a:p>
         </p:txBody>
       </p:sp>
@@ -5058,8 +4970,8 @@
         </p:nvSpPr>
         <p:spPr>
           <a:xfrm>
-            <a:off x="457200" y="6400800"/>
-            <a:ext cx="5486400" cy="274320"/>
+            <a:off x="502920" y="11750040"/>
+            <a:ext cx="4114800" cy="256032"/>
           </a:xfrm>
           <a:prstGeom prst="rect">
             <a:avLst/>
@@ -5075,7 +4987,7 @@
               <a:buNone/>
             </a:pPr>
             <a:r>
-              <a:rPr lang="en-US" sz="900" spc="100" kern="0" dirty="0">
+              <a:rPr lang="en-US" sz="800" spc="50" kern="0" dirty="0">
                 <a:solidFill>
                   <a:srgbClr val="6E6E6E"/>
                 </a:solidFill>
@@ -5085,7 +4997,7 @@
               </a:rPr>
               <a:t>TONY IMPORTADOS × MARCO</a:t>
             </a:r>
-            <a:endParaRPr lang="en-US" sz="900" dirty="0"/>
+            <a:endParaRPr lang="en-US" sz="800" dirty="0"/>
           </a:p>
         </p:txBody>
       </p:sp>
@@ -5122,24 +5034,24 @@
         </p:nvSpPr>
         <p:spPr>
           <a:xfrm>
-            <a:off x="640080" y="502920"/>
-            <a:ext cx="9144000" cy="320040"/>
-          </a:xfrm>
-          <a:prstGeom prst="rect">
-            <a:avLst/>
-          </a:prstGeom>
-          <a:noFill/>
-          <a:ln/>
-        </p:spPr>
-        <p:txBody>
-          <a:bodyPr wrap="square" lIns="0" tIns="0" rIns="0" bIns="0" rtlCol="0" anchor="ctr"/>
-          <a:lstStyle/>
-          <a:p>
-            <a:pPr indent="0" marL="0">
-              <a:buNone/>
-            </a:pPr>
-            <a:r>
-              <a:rPr lang="en-US" sz="1300" b="1" spc="200" kern="0" dirty="0">
+            <a:off x="502920" y="548640"/>
+            <a:ext cx="5852160" cy="292608"/>
+          </a:xfrm>
+          <a:prstGeom prst="rect">
+            <a:avLst/>
+          </a:prstGeom>
+          <a:noFill/>
+          <a:ln/>
+        </p:spPr>
+        <p:txBody>
+          <a:bodyPr wrap="square" lIns="0" tIns="0" rIns="0" bIns="0" rtlCol="0" anchor="ctr"/>
+          <a:lstStyle/>
+          <a:p>
+            <a:pPr indent="0" marL="0">
+              <a:buNone/>
+            </a:pPr>
+            <a:r>
+              <a:rPr lang="en-US" sz="1200" b="1" spc="180" kern="0" dirty="0">
                 <a:solidFill>
                   <a:srgbClr val="FFD600"/>
                 </a:solidFill>
@@ -5149,7 +5061,7 @@
               </a:rPr>
               <a:t>IDEAS DE CONTENIDO PARA VOS</a:t>
             </a:r>
-            <a:endParaRPr lang="en-US" sz="1300" dirty="0"/>
+            <a:endParaRPr lang="en-US" sz="1200" dirty="0"/>
           </a:p>
         </p:txBody>
       </p:sp>
@@ -5161,8 +5073,8 @@
         </p:nvSpPr>
         <p:spPr>
           <a:xfrm>
-            <a:off x="640080" y="777240"/>
-            <a:ext cx="10881360" cy="1188720"/>
+            <a:off x="502920" y="914400"/>
+            <a:ext cx="5852160" cy="1417320"/>
           </a:xfrm>
           <a:prstGeom prst="rect">
             <a:avLst/>
@@ -5176,12 +5088,12 @@
           <a:p>
             <a:pPr indent="0" marL="0">
               <a:lnSpc>
-                <a:spcPct val="100000"/>
+                <a:spcPct val="103000"/>
               </a:lnSpc>
               <a:buNone/>
             </a:pPr>
             <a:r>
-              <a:rPr lang="en-US" sz="3000" b="1" dirty="0">
+              <a:rPr lang="en-US" sz="2400" b="1" dirty="0">
                 <a:solidFill>
                   <a:srgbClr val="FFFFFF"/>
                 </a:solidFill>
@@ -5191,7 +5103,7 @@
               </a:rPr>
               <a:t>Contenido que construye audiencia, no solo que vende</a:t>
             </a:r>
-            <a:endParaRPr lang="en-US" sz="3000" dirty="0"/>
+            <a:endParaRPr lang="en-US" sz="2400" dirty="0"/>
           </a:p>
         </p:txBody>
       </p:sp>
@@ -5203,12 +5115,12 @@
         </p:nvSpPr>
         <p:spPr>
           <a:xfrm>
-            <a:off x="640080" y="2103120"/>
-            <a:ext cx="5349240" cy="1920240"/>
+            <a:off x="502920" y="2606040"/>
+            <a:ext cx="5852160" cy="1783080"/>
           </a:xfrm>
           <a:prstGeom prst="roundRect">
             <a:avLst>
-              <a:gd name="adj" fmla="val 4286"/>
+              <a:gd name="adj" fmla="val 4615"/>
             </a:avLst>
           </a:prstGeom>
           <a:solidFill>
@@ -5232,7 +5144,7 @@
         </p:nvSpPr>
         <p:spPr>
           <a:xfrm>
-            <a:off x="914400" y="2359152"/>
+            <a:off x="777240" y="2880360"/>
             <a:ext cx="146304" cy="146304"/>
           </a:xfrm>
           <a:prstGeom prst="ellipse">
@@ -5252,8 +5164,8 @@
         </p:nvSpPr>
         <p:spPr>
           <a:xfrm>
-            <a:off x="914400" y="2606040"/>
-            <a:ext cx="4754880" cy="365760"/>
+            <a:off x="1033272" y="2779776"/>
+            <a:ext cx="5029200" cy="365760"/>
           </a:xfrm>
           <a:prstGeom prst="rect">
             <a:avLst/>
@@ -5291,8 +5203,8 @@
         </p:nvSpPr>
         <p:spPr>
           <a:xfrm>
-            <a:off x="914400" y="3017520"/>
-            <a:ext cx="4754880" cy="868680"/>
+            <a:off x="777240" y="3264408"/>
+            <a:ext cx="5303520" cy="1005840"/>
           </a:xfrm>
           <a:prstGeom prst="rect">
             <a:avLst/>
@@ -5311,7 +5223,7 @@
               <a:buNone/>
             </a:pPr>
             <a:r>
-              <a:rPr lang="en-US" sz="1200" dirty="0">
+              <a:rPr lang="en-US" sz="1150" dirty="0">
                 <a:solidFill>
                   <a:srgbClr val="9A9A9A"/>
                 </a:solidFill>
@@ -5321,7 +5233,7 @@
               </a:rPr>
               <a:t>Entrenamiento o viaje con el outfit del Drop puesto — en tu rutina real.</a:t>
             </a:r>
-            <a:endParaRPr lang="en-US" sz="1200" dirty="0"/>
+            <a:endParaRPr lang="en-US" sz="1150" dirty="0"/>
           </a:p>
         </p:txBody>
       </p:sp>
@@ -5333,12 +5245,12 @@
         </p:nvSpPr>
         <p:spPr>
           <a:xfrm>
-            <a:off x="6172200" y="2103120"/>
-            <a:ext cx="5349240" cy="1920240"/>
+            <a:off x="502920" y="4553712"/>
+            <a:ext cx="5852160" cy="1783080"/>
           </a:xfrm>
           <a:prstGeom prst="roundRect">
             <a:avLst>
-              <a:gd name="adj" fmla="val 4286"/>
+              <a:gd name="adj" fmla="val 4615"/>
             </a:avLst>
           </a:prstGeom>
           <a:solidFill>
@@ -5362,7 +5274,7 @@
         </p:nvSpPr>
         <p:spPr>
           <a:xfrm>
-            <a:off x="6446520" y="2359152"/>
+            <a:off x="777240" y="4828032"/>
             <a:ext cx="146304" cy="146304"/>
           </a:xfrm>
           <a:prstGeom prst="ellipse">
@@ -5382,8 +5294,8 @@
         </p:nvSpPr>
         <p:spPr>
           <a:xfrm>
-            <a:off x="6446520" y="2606040"/>
-            <a:ext cx="4754880" cy="365760"/>
+            <a:off x="1033272" y="4727448"/>
+            <a:ext cx="5029200" cy="365760"/>
           </a:xfrm>
           <a:prstGeom prst="rect">
             <a:avLst/>
@@ -5421,8 +5333,8 @@
         </p:nvSpPr>
         <p:spPr>
           <a:xfrm>
-            <a:off x="6446520" y="3017520"/>
-            <a:ext cx="4754880" cy="868680"/>
+            <a:off x="777240" y="5212080"/>
+            <a:ext cx="5303520" cy="1005840"/>
           </a:xfrm>
           <a:prstGeom prst="rect">
             <a:avLst/>
@@ -5441,7 +5353,7 @@
               <a:buNone/>
             </a:pPr>
             <a:r>
-              <a:rPr lang="en-US" sz="1200" dirty="0">
+              <a:rPr lang="en-US" sz="1150" dirty="0">
                 <a:solidFill>
                   <a:srgbClr val="9A9A9A"/>
                 </a:solidFill>
@@ -5451,7 +5363,7 @@
               </a:rPr>
               <a:t>Tu experiencia con @kairo.stamp: lo que aprendiste armando algo propio.</a:t>
             </a:r>
-            <a:endParaRPr lang="en-US" sz="1200" dirty="0"/>
+            <a:endParaRPr lang="en-US" sz="1150" dirty="0"/>
           </a:p>
         </p:txBody>
       </p:sp>
@@ -5463,12 +5375,12 @@
         </p:nvSpPr>
         <p:spPr>
           <a:xfrm>
-            <a:off x="640080" y="4206240"/>
-            <a:ext cx="5349240" cy="1920240"/>
+            <a:off x="502920" y="6501384"/>
+            <a:ext cx="5852160" cy="1783080"/>
           </a:xfrm>
           <a:prstGeom prst="roundRect">
             <a:avLst>
-              <a:gd name="adj" fmla="val 4286"/>
+              <a:gd name="adj" fmla="val 4615"/>
             </a:avLst>
           </a:prstGeom>
           <a:solidFill>
@@ -5492,7 +5404,7 @@
         </p:nvSpPr>
         <p:spPr>
           <a:xfrm>
-            <a:off x="914400" y="4462272"/>
+            <a:off x="777240" y="6775704"/>
             <a:ext cx="146304" cy="146304"/>
           </a:xfrm>
           <a:prstGeom prst="ellipse">
@@ -5512,8 +5424,8 @@
         </p:nvSpPr>
         <p:spPr>
           <a:xfrm>
-            <a:off x="914400" y="4709160"/>
-            <a:ext cx="4754880" cy="365760"/>
+            <a:off x="1033272" y="6675120"/>
+            <a:ext cx="5029200" cy="365760"/>
           </a:xfrm>
           <a:prstGeom prst="rect">
             <a:avLst/>
@@ -5551,8 +5463,8 @@
         </p:nvSpPr>
         <p:spPr>
           <a:xfrm>
-            <a:off x="914400" y="5120640"/>
-            <a:ext cx="4754880" cy="868680"/>
+            <a:off x="777240" y="7159752"/>
+            <a:ext cx="5303520" cy="1005840"/>
           </a:xfrm>
           <a:prstGeom prst="rect">
             <a:avLst/>
@@ -5571,7 +5483,7 @@
               <a:buNone/>
             </a:pPr>
             <a:r>
-              <a:rPr lang="en-US" sz="1200" dirty="0">
+              <a:rPr lang="en-US" sz="1150" dirty="0">
                 <a:solidFill>
                   <a:srgbClr val="9A9A9A"/>
                 </a:solidFill>
@@ -5581,7 +5493,7 @@
               </a:rPr>
               <a:t>Retos y formatos virales — sin venta directa, solo alcance.</a:t>
             </a:r>
-            <a:endParaRPr lang="en-US" sz="1200" dirty="0"/>
+            <a:endParaRPr lang="en-US" sz="1150" dirty="0"/>
           </a:p>
         </p:txBody>
       </p:sp>
@@ -5593,12 +5505,12 @@
         </p:nvSpPr>
         <p:spPr>
           <a:xfrm>
-            <a:off x="6172200" y="4206240"/>
-            <a:ext cx="5349240" cy="1920240"/>
+            <a:off x="502920" y="8449056"/>
+            <a:ext cx="5852160" cy="1783080"/>
           </a:xfrm>
           <a:prstGeom prst="roundRect">
             <a:avLst>
-              <a:gd name="adj" fmla="val 4286"/>
+              <a:gd name="adj" fmla="val 4615"/>
             </a:avLst>
           </a:prstGeom>
           <a:solidFill>
@@ -5622,7 +5534,7 @@
         </p:nvSpPr>
         <p:spPr>
           <a:xfrm>
-            <a:off x="6446520" y="4462272"/>
+            <a:off x="777240" y="8723376"/>
             <a:ext cx="146304" cy="146304"/>
           </a:xfrm>
           <a:prstGeom prst="ellipse">
@@ -5642,8 +5554,8 @@
         </p:nvSpPr>
         <p:spPr>
           <a:xfrm>
-            <a:off x="6446520" y="4709160"/>
-            <a:ext cx="4754880" cy="365760"/>
+            <a:off x="1033272" y="8622792"/>
+            <a:ext cx="5029200" cy="365760"/>
           </a:xfrm>
           <a:prstGeom prst="rect">
             <a:avLst/>
@@ -5681,8 +5593,8 @@
         </p:nvSpPr>
         <p:spPr>
           <a:xfrm>
-            <a:off x="6446520" y="5120640"/>
-            <a:ext cx="4754880" cy="868680"/>
+            <a:off x="777240" y="9107424"/>
+            <a:ext cx="5303520" cy="1005840"/>
           </a:xfrm>
           <a:prstGeom prst="rect">
             <a:avLst/>
@@ -5701,7 +5613,7 @@
               <a:buNone/>
             </a:pPr>
             <a:r>
-              <a:rPr lang="en-US" sz="1200" dirty="0">
+              <a:rPr lang="en-US" sz="1150" dirty="0">
                 <a:solidFill>
                   <a:srgbClr val="9A9A9A"/>
                 </a:solidFill>
@@ -5711,7 +5623,7 @@
               </a:rPr>
               <a:t>Presentás un Drop, contás cuánto queda, marcás la urgencia real.</a:t>
             </a:r>
-            <a:endParaRPr lang="en-US" sz="1200" dirty="0"/>
+            <a:endParaRPr lang="en-US" sz="1150" dirty="0"/>
           </a:p>
         </p:txBody>
       </p:sp>
@@ -5723,8 +5635,8 @@
         </p:nvSpPr>
         <p:spPr>
           <a:xfrm>
-            <a:off x="11365992" y="6400800"/>
-            <a:ext cx="548640" cy="274320"/>
+            <a:off x="5989320" y="11750040"/>
+            <a:ext cx="457200" cy="256032"/>
           </a:xfrm>
           <a:prstGeom prst="rect">
             <a:avLst/>
@@ -5740,7 +5652,7 @@
               <a:buNone/>
             </a:pPr>
             <a:r>
-              <a:rPr lang="en-US" sz="1000" dirty="0">
+              <a:rPr lang="en-US" sz="900" dirty="0">
                 <a:solidFill>
                   <a:srgbClr val="6E6E6E"/>
                 </a:solidFill>
@@ -5750,7 +5662,7 @@
               </a:rPr>
               <a:t>06</a:t>
             </a:r>
-            <a:endParaRPr lang="en-US" sz="1000" dirty="0"/>
+            <a:endParaRPr lang="en-US" sz="900" dirty="0"/>
           </a:p>
         </p:txBody>
       </p:sp>
@@ -5762,8 +5674,8 @@
         </p:nvSpPr>
         <p:spPr>
           <a:xfrm>
-            <a:off x="457200" y="6400800"/>
-            <a:ext cx="5486400" cy="274320"/>
+            <a:off x="502920" y="11750040"/>
+            <a:ext cx="4114800" cy="256032"/>
           </a:xfrm>
           <a:prstGeom prst="rect">
             <a:avLst/>
@@ -5779,7 +5691,7 @@
               <a:buNone/>
             </a:pPr>
             <a:r>
-              <a:rPr lang="en-US" sz="900" spc="100" kern="0" dirty="0">
+              <a:rPr lang="en-US" sz="800" spc="50" kern="0" dirty="0">
                 <a:solidFill>
                   <a:srgbClr val="6E6E6E"/>
                 </a:solidFill>
@@ -5789,7 +5701,7 @@
               </a:rPr>
               <a:t>TONY IMPORTADOS × MARCO</a:t>
             </a:r>
-            <a:endParaRPr lang="en-US" sz="900" dirty="0"/>
+            <a:endParaRPr lang="en-US" sz="800" dirty="0"/>
           </a:p>
         </p:txBody>
       </p:sp>
@@ -5827,7 +5739,7 @@
         <p:spPr>
           <a:xfrm>
             <a:off x="0" y="0"/>
-            <a:ext cx="12188952" cy="6858000"/>
+            <a:ext cx="6858000" cy="12188952"/>
           </a:xfrm>
           <a:prstGeom prst="rect">
             <a:avLst/>
@@ -5846,24 +5758,24 @@
         </p:nvSpPr>
         <p:spPr>
           <a:xfrm>
-            <a:off x="640080" y="502920"/>
-            <a:ext cx="9144000" cy="320040"/>
-          </a:xfrm>
-          <a:prstGeom prst="rect">
-            <a:avLst/>
-          </a:prstGeom>
-          <a:noFill/>
-          <a:ln/>
-        </p:spPr>
-        <p:txBody>
-          <a:bodyPr wrap="square" lIns="0" tIns="0" rIns="0" bIns="0" rtlCol="0" anchor="ctr"/>
-          <a:lstStyle/>
-          <a:p>
-            <a:pPr indent="0" marL="0">
-              <a:buNone/>
-            </a:pPr>
-            <a:r>
-              <a:rPr lang="en-US" sz="1300" b="1" spc="200" kern="0" dirty="0">
+            <a:off x="502920" y="548640"/>
+            <a:ext cx="5852160" cy="292608"/>
+          </a:xfrm>
+          <a:prstGeom prst="rect">
+            <a:avLst/>
+          </a:prstGeom>
+          <a:noFill/>
+          <a:ln/>
+        </p:spPr>
+        <p:txBody>
+          <a:bodyPr wrap="square" lIns="0" tIns="0" rIns="0" bIns="0" rtlCol="0" anchor="ctr"/>
+          <a:lstStyle/>
+          <a:p>
+            <a:pPr indent="0" marL="0">
+              <a:buNone/>
+            </a:pPr>
+            <a:r>
+              <a:rPr lang="en-US" sz="1200" b="1" spc="180" kern="0" dirty="0">
                 <a:solidFill>
                   <a:srgbClr val="FF1E1E"/>
                 </a:solidFill>
@@ -5873,7 +5785,7 @@
               </a:rPr>
               <a:t>REGLAS DEL JUEGO</a:t>
             </a:r>
-            <a:endParaRPr lang="en-US" sz="1300" dirty="0"/>
+            <a:endParaRPr lang="en-US" sz="1200" dirty="0"/>
           </a:p>
         </p:txBody>
       </p:sp>
@@ -5885,8 +5797,8 @@
         </p:nvSpPr>
         <p:spPr>
           <a:xfrm>
-            <a:off x="640080" y="777240"/>
-            <a:ext cx="10881360" cy="1188720"/>
+            <a:off x="502920" y="914400"/>
+            <a:ext cx="5852160" cy="1417320"/>
           </a:xfrm>
           <a:prstGeom prst="rect">
             <a:avLst/>
@@ -5900,12 +5812,12 @@
           <a:p>
             <a:pPr indent="0" marL="0">
               <a:lnSpc>
-                <a:spcPct val="100000"/>
+                <a:spcPct val="103000"/>
               </a:lnSpc>
               <a:buNone/>
             </a:pPr>
             <a:r>
-              <a:rPr lang="en-US" sz="3000" b="1" dirty="0">
+              <a:rPr lang="en-US" sz="2400" b="1" dirty="0">
                 <a:solidFill>
                   <a:srgbClr val="FFFFFF"/>
                 </a:solidFill>
@@ -5915,7 +5827,7 @@
               </a:rPr>
               <a:t>No prometemos ganancias, ni te pedimos que lo hagas</a:t>
             </a:r>
-            <a:endParaRPr lang="en-US" sz="3000" dirty="0"/>
+            <a:endParaRPr lang="en-US" sz="2400" dirty="0"/>
           </a:p>
         </p:txBody>
       </p:sp>
@@ -5927,12 +5839,12 @@
         </p:nvSpPr>
         <p:spPr>
           <a:xfrm>
-            <a:off x="640080" y="2148840"/>
-            <a:ext cx="10908792" cy="1234440"/>
+            <a:off x="502920" y="2606040"/>
+            <a:ext cx="5852160" cy="2331720"/>
           </a:xfrm>
           <a:prstGeom prst="roundRect">
             <a:avLst>
-              <a:gd name="adj" fmla="val 6667"/>
+              <a:gd name="adj" fmla="val 3529"/>
             </a:avLst>
           </a:prstGeom>
           <a:solidFill>
@@ -5956,8 +5868,8 @@
         </p:nvSpPr>
         <p:spPr>
           <a:xfrm>
-            <a:off x="960120" y="2551176"/>
-            <a:ext cx="438912" cy="438912"/>
+            <a:off x="795528" y="2898648"/>
+            <a:ext cx="457200" cy="457200"/>
           </a:xfrm>
           <a:prstGeom prst="ellipse">
             <a:avLst/>
@@ -5976,8 +5888,8 @@
         </p:nvSpPr>
         <p:spPr>
           <a:xfrm>
-            <a:off x="960120" y="2551176"/>
-            <a:ext cx="438912" cy="438912"/>
+            <a:off x="795528" y="2898648"/>
+            <a:ext cx="457200" cy="457200"/>
           </a:xfrm>
           <a:prstGeom prst="rect">
             <a:avLst/>
@@ -6015,24 +5927,27 @@
         </p:nvSpPr>
         <p:spPr>
           <a:xfrm>
-            <a:off x="1691640" y="2350008"/>
-            <a:ext cx="9509760" cy="411480"/>
-          </a:xfrm>
-          <a:prstGeom prst="rect">
-            <a:avLst/>
-          </a:prstGeom>
-          <a:noFill/>
-          <a:ln/>
-        </p:spPr>
-        <p:txBody>
-          <a:bodyPr wrap="square" lIns="0" tIns="0" rIns="0" bIns="0" rtlCol="0" anchor="ctr"/>
-          <a:lstStyle/>
-          <a:p>
-            <a:pPr indent="0" marL="0">
-              <a:buNone/>
-            </a:pPr>
-            <a:r>
-              <a:rPr lang="en-US" sz="1600" b="1" dirty="0">
+            <a:off x="1463040" y="2825496"/>
+            <a:ext cx="4617720" cy="594360"/>
+          </a:xfrm>
+          <a:prstGeom prst="rect">
+            <a:avLst/>
+          </a:prstGeom>
+          <a:noFill/>
+          <a:ln/>
+        </p:spPr>
+        <p:txBody>
+          <a:bodyPr wrap="square" lIns="0" tIns="0" rIns="0" bIns="0" rtlCol="0" anchor="ctr"/>
+          <a:lstStyle/>
+          <a:p>
+            <a:pPr indent="0" marL="0">
+              <a:lnSpc>
+                <a:spcPct val="115000"/>
+              </a:lnSpc>
+              <a:buNone/>
+            </a:pPr>
+            <a:r>
+              <a:rPr lang="en-US" sz="1500" b="1" dirty="0">
                 <a:solidFill>
                   <a:srgbClr val="FFFFFF"/>
                 </a:solidFill>
@@ -6042,7 +5957,7 @@
               </a:rPr>
               <a:t>Sin promesas de ingresos</a:t>
             </a:r>
-            <a:endParaRPr lang="en-US" sz="1600" dirty="0"/>
+            <a:endParaRPr lang="en-US" sz="1500" dirty="0"/>
           </a:p>
         </p:txBody>
       </p:sp>
@@ -6054,8 +5969,8 @@
         </p:nvSpPr>
         <p:spPr>
           <a:xfrm>
-            <a:off x="1691640" y="2770632"/>
-            <a:ext cx="9509760" cy="502920"/>
+            <a:off x="795528" y="3657600"/>
+            <a:ext cx="5266944" cy="1097280"/>
           </a:xfrm>
           <a:prstGeom prst="rect">
             <a:avLst/>
@@ -6069,12 +5984,12 @@
           <a:p>
             <a:pPr indent="0" marL="0">
               <a:lnSpc>
-                <a:spcPct val="125000"/>
+                <a:spcPct val="130000"/>
               </a:lnSpc>
               <a:buNone/>
             </a:pPr>
             <a:r>
-              <a:rPr lang="en-US" sz="1300" dirty="0">
+              <a:rPr lang="en-US" sz="1200" dirty="0">
                 <a:solidFill>
                   <a:srgbClr val="D8B9B9"/>
                 </a:solidFill>
@@ -6084,7 +5999,7 @@
               </a:rPr>
               <a:t>Ni nosotros ni vos hablamos de cifras de venta o ganancia como si fueran garantizadas.</a:t>
             </a:r>
-            <a:endParaRPr lang="en-US" sz="1300" dirty="0"/>
+            <a:endParaRPr lang="en-US" sz="1200" dirty="0"/>
           </a:p>
         </p:txBody>
       </p:sp>
@@ -6096,12 +6011,12 @@
         </p:nvSpPr>
         <p:spPr>
           <a:xfrm>
-            <a:off x="640080" y="3566160"/>
-            <a:ext cx="10908792" cy="1234440"/>
+            <a:off x="502920" y="5120640"/>
+            <a:ext cx="5852160" cy="2331720"/>
           </a:xfrm>
           <a:prstGeom prst="roundRect">
             <a:avLst>
-              <a:gd name="adj" fmla="val 6667"/>
+              <a:gd name="adj" fmla="val 3529"/>
             </a:avLst>
           </a:prstGeom>
           <a:solidFill>
@@ -6125,8 +6040,8 @@
         </p:nvSpPr>
         <p:spPr>
           <a:xfrm>
-            <a:off x="960120" y="3968496"/>
-            <a:ext cx="438912" cy="438912"/>
+            <a:off x="795528" y="5413248"/>
+            <a:ext cx="457200" cy="457200"/>
           </a:xfrm>
           <a:prstGeom prst="ellipse">
             <a:avLst/>
@@ -6145,8 +6060,8 @@
         </p:nvSpPr>
         <p:spPr>
           <a:xfrm>
-            <a:off x="960120" y="3968496"/>
-            <a:ext cx="438912" cy="438912"/>
+            <a:off x="795528" y="5413248"/>
+            <a:ext cx="457200" cy="457200"/>
           </a:xfrm>
           <a:prstGeom prst="rect">
             <a:avLst/>
@@ -6184,24 +6099,27 @@
         </p:nvSpPr>
         <p:spPr>
           <a:xfrm>
-            <a:off x="1691640" y="3767328"/>
-            <a:ext cx="9509760" cy="411480"/>
-          </a:xfrm>
-          <a:prstGeom prst="rect">
-            <a:avLst/>
-          </a:prstGeom>
-          <a:noFill/>
-          <a:ln/>
-        </p:spPr>
-        <p:txBody>
-          <a:bodyPr wrap="square" lIns="0" tIns="0" rIns="0" bIns="0" rtlCol="0" anchor="ctr"/>
-          <a:lstStyle/>
-          <a:p>
-            <a:pPr indent="0" marL="0">
-              <a:buNone/>
-            </a:pPr>
-            <a:r>
-              <a:rPr lang="en-US" sz="1600" b="1" dirty="0">
+            <a:off x="1463040" y="5340096"/>
+            <a:ext cx="4617720" cy="594360"/>
+          </a:xfrm>
+          <a:prstGeom prst="rect">
+            <a:avLst/>
+          </a:prstGeom>
+          <a:noFill/>
+          <a:ln/>
+        </p:spPr>
+        <p:txBody>
+          <a:bodyPr wrap="square" lIns="0" tIns="0" rIns="0" bIns="0" rtlCol="0" anchor="ctr"/>
+          <a:lstStyle/>
+          <a:p>
+            <a:pPr indent="0" marL="0">
+              <a:lnSpc>
+                <a:spcPct val="115000"/>
+              </a:lnSpc>
+              <a:buNone/>
+            </a:pPr>
+            <a:r>
+              <a:rPr lang="en-US" sz="1500" b="1" dirty="0">
                 <a:solidFill>
                   <a:srgbClr val="FFFFFF"/>
                 </a:solidFill>
@@ -6211,7 +6129,7 @@
               </a:rPr>
               <a:t>Sin estructura de reclutamiento</a:t>
             </a:r>
-            <a:endParaRPr lang="en-US" sz="1600" dirty="0"/>
+            <a:endParaRPr lang="en-US" sz="1500" dirty="0"/>
           </a:p>
         </p:txBody>
       </p:sp>
@@ -6223,8 +6141,8 @@
         </p:nvSpPr>
         <p:spPr>
           <a:xfrm>
-            <a:off x="1691640" y="4187952"/>
-            <a:ext cx="9509760" cy="502920"/>
+            <a:off x="795528" y="6172200"/>
+            <a:ext cx="5266944" cy="1097280"/>
           </a:xfrm>
           <a:prstGeom prst="rect">
             <a:avLst/>
@@ -6238,12 +6156,12 @@
           <a:p>
             <a:pPr indent="0" marL="0">
               <a:lnSpc>
-                <a:spcPct val="125000"/>
+                <a:spcPct val="130000"/>
               </a:lnSpc>
               <a:buNone/>
             </a:pPr>
             <a:r>
-              <a:rPr lang="en-US" sz="1300" dirty="0">
+              <a:rPr lang="en-US" sz="1200" dirty="0">
                 <a:solidFill>
                   <a:srgbClr val="D8B9B9"/>
                 </a:solidFill>
@@ -6253,7 +6171,7 @@
               </a:rPr>
               <a:t>Esto no es venta directa ni un esquema de captar gente — es un combo de producto, con reventa opcional.</a:t>
             </a:r>
-            <a:endParaRPr lang="en-US" sz="1300" dirty="0"/>
+            <a:endParaRPr lang="en-US" sz="1200" dirty="0"/>
           </a:p>
         </p:txBody>
       </p:sp>
@@ -6265,12 +6183,12 @@
         </p:nvSpPr>
         <p:spPr>
           <a:xfrm>
-            <a:off x="640080" y="4983480"/>
-            <a:ext cx="10908792" cy="1234440"/>
+            <a:off x="502920" y="7635240"/>
+            <a:ext cx="5852160" cy="2331720"/>
           </a:xfrm>
           <a:prstGeom prst="roundRect">
             <a:avLst>
-              <a:gd name="adj" fmla="val 6667"/>
+              <a:gd name="adj" fmla="val 3529"/>
             </a:avLst>
           </a:prstGeom>
           <a:solidFill>
@@ -6294,8 +6212,8 @@
         </p:nvSpPr>
         <p:spPr>
           <a:xfrm>
-            <a:off x="960120" y="5385816"/>
-            <a:ext cx="438912" cy="438912"/>
+            <a:off x="795528" y="7927848"/>
+            <a:ext cx="457200" cy="457200"/>
           </a:xfrm>
           <a:prstGeom prst="ellipse">
             <a:avLst/>
@@ -6314,8 +6232,8 @@
         </p:nvSpPr>
         <p:spPr>
           <a:xfrm>
-            <a:off x="960120" y="5385816"/>
-            <a:ext cx="438912" cy="438912"/>
+            <a:off x="795528" y="7927848"/>
+            <a:ext cx="457200" cy="457200"/>
           </a:xfrm>
           <a:prstGeom prst="rect">
             <a:avLst/>
@@ -6353,24 +6271,27 @@
         </p:nvSpPr>
         <p:spPr>
           <a:xfrm>
-            <a:off x="1691640" y="5184648"/>
-            <a:ext cx="9509760" cy="411480"/>
-          </a:xfrm>
-          <a:prstGeom prst="rect">
-            <a:avLst/>
-          </a:prstGeom>
-          <a:noFill/>
-          <a:ln/>
-        </p:spPr>
-        <p:txBody>
-          <a:bodyPr wrap="square" lIns="0" tIns="0" rIns="0" bIns="0" rtlCol="0" anchor="ctr"/>
-          <a:lstStyle/>
-          <a:p>
-            <a:pPr indent="0" marL="0">
-              <a:buNone/>
-            </a:pPr>
-            <a:r>
-              <a:rPr lang="en-US" sz="1600" b="1" dirty="0">
+            <a:off x="1463040" y="7854696"/>
+            <a:ext cx="4617720" cy="594360"/>
+          </a:xfrm>
+          <a:prstGeom prst="rect">
+            <a:avLst/>
+          </a:prstGeom>
+          <a:noFill/>
+          <a:ln/>
+        </p:spPr>
+        <p:txBody>
+          <a:bodyPr wrap="square" lIns="0" tIns="0" rIns="0" bIns="0" rtlCol="0" anchor="ctr"/>
+          <a:lstStyle/>
+          <a:p>
+            <a:pPr indent="0" marL="0">
+              <a:lnSpc>
+                <a:spcPct val="115000"/>
+              </a:lnSpc>
+              <a:buNone/>
+            </a:pPr>
+            <a:r>
+              <a:rPr lang="en-US" sz="1500" b="1" dirty="0">
                 <a:solidFill>
                   <a:srgbClr val="FFFFFF"/>
                 </a:solidFill>
@@ -6380,7 +6301,7 @@
               </a:rPr>
               <a:t>Ejemplos, siempre marcados como ejemplos</a:t>
             </a:r>
-            <a:endParaRPr lang="en-US" sz="1600" dirty="0"/>
+            <a:endParaRPr lang="en-US" sz="1500" dirty="0"/>
           </a:p>
         </p:txBody>
       </p:sp>
@@ -6392,8 +6313,8 @@
         </p:nvSpPr>
         <p:spPr>
           <a:xfrm>
-            <a:off x="1691640" y="5605272"/>
-            <a:ext cx="9509760" cy="502920"/>
+            <a:off x="795528" y="8686800"/>
+            <a:ext cx="5266944" cy="1097280"/>
           </a:xfrm>
           <a:prstGeom prst="rect">
             <a:avLst/>
@@ -6407,12 +6328,12 @@
           <a:p>
             <a:pPr indent="0" marL="0">
               <a:lnSpc>
-                <a:spcPct val="125000"/>
+                <a:spcPct val="130000"/>
               </a:lnSpc>
               <a:buNone/>
             </a:pPr>
             <a:r>
-              <a:rPr lang="en-US" sz="1300" dirty="0">
+              <a:rPr lang="en-US" sz="1200" dirty="0">
                 <a:solidFill>
                   <a:srgbClr val="D8B9B9"/>
                 </a:solidFill>
@@ -6422,7 +6343,7 @@
               </a:rPr>
               <a:t>Si mostramos un número, se aclara que es hipotético — nunca una expectativa real.</a:t>
             </a:r>
-            <a:endParaRPr lang="en-US" sz="1300" dirty="0"/>
+            <a:endParaRPr lang="en-US" sz="1200" dirty="0"/>
           </a:p>
         </p:txBody>
       </p:sp>
@@ -6434,8 +6355,8 @@
         </p:nvSpPr>
         <p:spPr>
           <a:xfrm>
-            <a:off x="11365992" y="6400800"/>
-            <a:ext cx="548640" cy="274320"/>
+            <a:off x="5989320" y="11750040"/>
+            <a:ext cx="457200" cy="256032"/>
           </a:xfrm>
           <a:prstGeom prst="rect">
             <a:avLst/>
@@ -6451,7 +6372,7 @@
               <a:buNone/>
             </a:pPr>
             <a:r>
-              <a:rPr lang="en-US" sz="1000" dirty="0">
+              <a:rPr lang="en-US" sz="900" dirty="0">
                 <a:solidFill>
                   <a:srgbClr val="6E6E6E"/>
                 </a:solidFill>
@@ -6461,7 +6382,7 @@
               </a:rPr>
               <a:t>07</a:t>
             </a:r>
-            <a:endParaRPr lang="en-US" sz="1000" dirty="0"/>
+            <a:endParaRPr lang="en-US" sz="900" dirty="0"/>
           </a:p>
         </p:txBody>
       </p:sp>
@@ -6473,8 +6394,8 @@
         </p:nvSpPr>
         <p:spPr>
           <a:xfrm>
-            <a:off x="457200" y="6400800"/>
-            <a:ext cx="5486400" cy="274320"/>
+            <a:off x="502920" y="11750040"/>
+            <a:ext cx="4114800" cy="256032"/>
           </a:xfrm>
           <a:prstGeom prst="rect">
             <a:avLst/>
@@ -6490,7 +6411,7 @@
               <a:buNone/>
             </a:pPr>
             <a:r>
-              <a:rPr lang="en-US" sz="900" spc="100" kern="0" dirty="0">
+              <a:rPr lang="en-US" sz="800" spc="50" kern="0" dirty="0">
                 <a:solidFill>
                   <a:srgbClr val="6E6E6E"/>
                 </a:solidFill>
@@ -6500,7 +6421,7 @@
               </a:rPr>
               <a:t>TONY IMPORTADOS × MARCO</a:t>
             </a:r>
-            <a:endParaRPr lang="en-US" sz="900" dirty="0"/>
+            <a:endParaRPr lang="en-US" sz="800" dirty="0"/>
           </a:p>
         </p:txBody>
       </p:sp>
@@ -6537,24 +6458,24 @@
         </p:nvSpPr>
         <p:spPr>
           <a:xfrm>
-            <a:off x="640080" y="502920"/>
-            <a:ext cx="9144000" cy="320040"/>
-          </a:xfrm>
-          <a:prstGeom prst="rect">
-            <a:avLst/>
-          </a:prstGeom>
-          <a:noFill/>
-          <a:ln/>
-        </p:spPr>
-        <p:txBody>
-          <a:bodyPr wrap="square" lIns="0" tIns="0" rIns="0" bIns="0" rtlCol="0" anchor="ctr"/>
-          <a:lstStyle/>
-          <a:p>
-            <a:pPr indent="0" marL="0">
-              <a:buNone/>
-            </a:pPr>
-            <a:r>
-              <a:rPr lang="en-US" sz="1300" b="1" spc="200" kern="0" dirty="0">
+            <a:off x="502920" y="548640"/>
+            <a:ext cx="5852160" cy="292608"/>
+          </a:xfrm>
+          <a:prstGeom prst="rect">
+            <a:avLst/>
+          </a:prstGeom>
+          <a:noFill/>
+          <a:ln/>
+        </p:spPr>
+        <p:txBody>
+          <a:bodyPr wrap="square" lIns="0" tIns="0" rIns="0" bIns="0" rtlCol="0" anchor="ctr"/>
+          <a:lstStyle/>
+          <a:p>
+            <a:pPr indent="0" marL="0">
+              <a:buNone/>
+            </a:pPr>
+            <a:r>
+              <a:rPr lang="en-US" sz="1200" b="1" spc="180" kern="0" dirty="0">
                 <a:solidFill>
                   <a:srgbClr val="00A8FF"/>
                 </a:solidFill>
@@ -6564,7 +6485,7 @@
               </a:rPr>
               <a:t>PRÓXIMAS SEMANAS</a:t>
             </a:r>
-            <a:endParaRPr lang="en-US" sz="1300" dirty="0"/>
+            <a:endParaRPr lang="en-US" sz="1200" dirty="0"/>
           </a:p>
         </p:txBody>
       </p:sp>
@@ -6576,8 +6497,8 @@
         </p:nvSpPr>
         <p:spPr>
           <a:xfrm>
-            <a:off x="640080" y="777240"/>
-            <a:ext cx="10881360" cy="1188720"/>
+            <a:off x="502920" y="914400"/>
+            <a:ext cx="5852160" cy="1417320"/>
           </a:xfrm>
           <a:prstGeom prst="rect">
             <a:avLst/>
@@ -6591,12 +6512,12 @@
           <a:p>
             <a:pPr indent="0" marL="0">
               <a:lnSpc>
-                <a:spcPct val="100000"/>
+                <a:spcPct val="103000"/>
               </a:lnSpc>
               <a:buNone/>
             </a:pPr>
             <a:r>
-              <a:rPr lang="en-US" sz="3000" b="1" dirty="0">
+              <a:rPr lang="en-US" sz="2600" b="1" dirty="0">
                 <a:solidFill>
                   <a:srgbClr val="FFFFFF"/>
                 </a:solidFill>
@@ -6606,7 +6527,7 @@
               </a:rPr>
               <a:t>Así arrancaríamos, si te suma</a:t>
             </a:r>
-            <a:endParaRPr lang="en-US" sz="3000" dirty="0"/>
+            <a:endParaRPr lang="en-US" sz="2600" dirty="0"/>
           </a:p>
         </p:txBody>
       </p:sp>
@@ -6618,12 +6539,12 @@
         </p:nvSpPr>
         <p:spPr>
           <a:xfrm>
-            <a:off x="640080" y="2194560"/>
-            <a:ext cx="3520440" cy="3840480"/>
+            <a:off x="502920" y="2606040"/>
+            <a:ext cx="5852160" cy="2514600"/>
           </a:xfrm>
           <a:prstGeom prst="roundRect">
             <a:avLst>
-              <a:gd name="adj" fmla="val 2338"/>
+              <a:gd name="adj" fmla="val 3273"/>
             </a:avLst>
           </a:prstGeom>
           <a:solidFill>
@@ -6647,8 +6568,8 @@
         </p:nvSpPr>
         <p:spPr>
           <a:xfrm>
-            <a:off x="914400" y="2423160"/>
-            <a:ext cx="2103120" cy="384048"/>
+            <a:off x="777240" y="2862072"/>
+            <a:ext cx="1691640" cy="384048"/>
           </a:xfrm>
           <a:prstGeom prst="roundRect">
             <a:avLst>
@@ -6674,24 +6595,24 @@
         </p:nvSpPr>
         <p:spPr>
           <a:xfrm>
-            <a:off x="914400" y="2423160"/>
-            <a:ext cx="2103120" cy="384048"/>
-          </a:xfrm>
-          <a:prstGeom prst="rect">
-            <a:avLst/>
-          </a:prstGeom>
-          <a:noFill/>
-          <a:ln/>
-        </p:spPr>
-        <p:txBody>
-          <a:bodyPr wrap="square" lIns="0" tIns="0" rIns="0" bIns="0" rtlCol="0" anchor="ctr"/>
-          <a:lstStyle/>
-          <a:p>
-            <a:pPr indent="0" marL="0">
-              <a:buNone/>
-            </a:pPr>
-            <a:r>
-              <a:rPr lang="en-US" sz="1200" b="1" dirty="0">
+            <a:off x="777240" y="2862072"/>
+            <a:ext cx="1691640" cy="384048"/>
+          </a:xfrm>
+          <a:prstGeom prst="rect">
+            <a:avLst/>
+          </a:prstGeom>
+          <a:noFill/>
+          <a:ln/>
+        </p:spPr>
+        <p:txBody>
+          <a:bodyPr wrap="square" lIns="0" tIns="0" rIns="0" bIns="0" rtlCol="0" anchor="ctr"/>
+          <a:lstStyle/>
+          <a:p>
+            <a:pPr algn="ctr" indent="0" marL="0">
+              <a:buNone/>
+            </a:pPr>
+            <a:r>
+              <a:rPr lang="en-US" sz="1250" b="1" dirty="0">
                 <a:solidFill>
                   <a:srgbClr val="FF1E1E"/>
                 </a:solidFill>
@@ -6701,7 +6622,7 @@
               </a:rPr>
               <a:t>Semana 1</a:t>
             </a:r>
-            <a:endParaRPr lang="en-US" sz="1200" dirty="0"/>
+            <a:endParaRPr lang="en-US" sz="1250" dirty="0"/>
           </a:p>
         </p:txBody>
       </p:sp>
@@ -6713,8 +6634,8 @@
         </p:nvSpPr>
         <p:spPr>
           <a:xfrm>
-            <a:off x="914400" y="3017520"/>
-            <a:ext cx="3017520" cy="2743200"/>
+            <a:off x="777240" y="3429000"/>
+            <a:ext cx="5303520" cy="1508760"/>
           </a:xfrm>
           <a:prstGeom prst="rect">
             <a:avLst/>
@@ -6728,12 +6649,12 @@
           <a:p>
             <a:pPr indent="0" marL="0">
               <a:lnSpc>
-                <a:spcPct val="130000"/>
+                <a:spcPct val="132000"/>
               </a:lnSpc>
               <a:buNone/>
             </a:pPr>
             <a:r>
-              <a:rPr lang="en-US" sz="1200" dirty="0">
+              <a:rPr lang="en-US" sz="1250" dirty="0">
                 <a:solidFill>
                   <a:srgbClr val="9A9A9A"/>
                 </a:solidFill>
@@ -6743,7 +6664,7 @@
               </a:rPr>
               <a:t>Charla + jornada de producción liviana: algunas piezas de Lifestyle y Entrepreneurship, sin presión de venta.</a:t>
             </a:r>
-            <a:endParaRPr lang="en-US" sz="1200" dirty="0"/>
+            <a:endParaRPr lang="en-US" sz="1250" dirty="0"/>
           </a:p>
         </p:txBody>
       </p:sp>
@@ -6755,12 +6676,12 @@
         </p:nvSpPr>
         <p:spPr>
           <a:xfrm>
-            <a:off x="4343400" y="2194560"/>
-            <a:ext cx="3520440" cy="3840480"/>
+            <a:off x="502920" y="5303520"/>
+            <a:ext cx="5852160" cy="2514600"/>
           </a:xfrm>
           <a:prstGeom prst="roundRect">
             <a:avLst>
-              <a:gd name="adj" fmla="val 2338"/>
+              <a:gd name="adj" fmla="val 3273"/>
             </a:avLst>
           </a:prstGeom>
           <a:solidFill>
@@ -6784,8 +6705,8 @@
         </p:nvSpPr>
         <p:spPr>
           <a:xfrm>
-            <a:off x="4617720" y="2423160"/>
-            <a:ext cx="2103120" cy="384048"/>
+            <a:off x="777240" y="5559552"/>
+            <a:ext cx="1691640" cy="384048"/>
           </a:xfrm>
           <a:prstGeom prst="roundRect">
             <a:avLst>
@@ -6811,24 +6732,24 @@
         </p:nvSpPr>
         <p:spPr>
           <a:xfrm>
-            <a:off x="4617720" y="2423160"/>
-            <a:ext cx="2103120" cy="384048"/>
-          </a:xfrm>
-          <a:prstGeom prst="rect">
-            <a:avLst/>
-          </a:prstGeom>
-          <a:noFill/>
-          <a:ln/>
-        </p:spPr>
-        <p:txBody>
-          <a:bodyPr wrap="square" lIns="0" tIns="0" rIns="0" bIns="0" rtlCol="0" anchor="ctr"/>
-          <a:lstStyle/>
-          <a:p>
-            <a:pPr indent="0" marL="0">
-              <a:buNone/>
-            </a:pPr>
-            <a:r>
-              <a:rPr lang="en-US" sz="1200" b="1" dirty="0">
+            <a:off x="777240" y="5559552"/>
+            <a:ext cx="1691640" cy="384048"/>
+          </a:xfrm>
+          <a:prstGeom prst="rect">
+            <a:avLst/>
+          </a:prstGeom>
+          <a:noFill/>
+          <a:ln/>
+        </p:spPr>
+        <p:txBody>
+          <a:bodyPr wrap="square" lIns="0" tIns="0" rIns="0" bIns="0" rtlCol="0" anchor="ctr"/>
+          <a:lstStyle/>
+          <a:p>
+            <a:pPr algn="ctr" indent="0" marL="0">
+              <a:buNone/>
+            </a:pPr>
+            <a:r>
+              <a:rPr lang="en-US" sz="1250" b="1" dirty="0">
                 <a:solidFill>
                   <a:srgbClr val="FFD600"/>
                 </a:solidFill>
@@ -6838,7 +6759,7 @@
               </a:rPr>
               <a:t>Semana 2-3</a:t>
             </a:r>
-            <a:endParaRPr lang="en-US" sz="1200" dirty="0"/>
+            <a:endParaRPr lang="en-US" sz="1250" dirty="0"/>
           </a:p>
         </p:txBody>
       </p:sp>
@@ -6850,8 +6771,8 @@
         </p:nvSpPr>
         <p:spPr>
           <a:xfrm>
-            <a:off x="4617720" y="3017520"/>
-            <a:ext cx="3017520" cy="2743200"/>
+            <a:off x="777240" y="6126480"/>
+            <a:ext cx="5303520" cy="1508760"/>
           </a:xfrm>
           <a:prstGeom prst="rect">
             <a:avLst/>
@@ -6865,12 +6786,12 @@
           <a:p>
             <a:pPr indent="0" marL="0">
               <a:lnSpc>
-                <a:spcPct val="130000"/>
+                <a:spcPct val="132000"/>
               </a:lnSpc>
               <a:buNone/>
             </a:pPr>
             <a:r>
-              <a:rPr lang="en-US" sz="1200" dirty="0">
+              <a:rPr lang="en-US" sz="1250" dirty="0">
                 <a:solidFill>
                   <a:srgbClr val="9A9A9A"/>
                 </a:solidFill>
@@ -6880,7 +6801,7 @@
               </a:rPr>
               <a:t>Primeras piezas publicadas, mezcladas con tu contenido habitual. Medimos cómo responde tu audiencia.</a:t>
             </a:r>
-            <a:endParaRPr lang="en-US" sz="1200" dirty="0"/>
+            <a:endParaRPr lang="en-US" sz="1250" dirty="0"/>
           </a:p>
         </p:txBody>
       </p:sp>
@@ -6892,12 +6813,12 @@
         </p:nvSpPr>
         <p:spPr>
           <a:xfrm>
-            <a:off x="8046720" y="2194560"/>
-            <a:ext cx="3520440" cy="3840480"/>
+            <a:off x="502920" y="8001000"/>
+            <a:ext cx="5852160" cy="2514600"/>
           </a:xfrm>
           <a:prstGeom prst="roundRect">
             <a:avLst>
-              <a:gd name="adj" fmla="val 2338"/>
+              <a:gd name="adj" fmla="val 3273"/>
             </a:avLst>
           </a:prstGeom>
           <a:solidFill>
@@ -6921,8 +6842,8 @@
         </p:nvSpPr>
         <p:spPr>
           <a:xfrm>
-            <a:off x="8321040" y="2423160"/>
-            <a:ext cx="2103120" cy="384048"/>
+            <a:off x="777240" y="8257032"/>
+            <a:ext cx="1691640" cy="384048"/>
           </a:xfrm>
           <a:prstGeom prst="roundRect">
             <a:avLst>
@@ -6948,24 +6869,24 @@
         </p:nvSpPr>
         <p:spPr>
           <a:xfrm>
-            <a:off x="8321040" y="2423160"/>
-            <a:ext cx="2103120" cy="384048"/>
-          </a:xfrm>
-          <a:prstGeom prst="rect">
-            <a:avLst/>
-          </a:prstGeom>
-          <a:noFill/>
-          <a:ln/>
-        </p:spPr>
-        <p:txBody>
-          <a:bodyPr wrap="square" lIns="0" tIns="0" rIns="0" bIns="0" rtlCol="0" anchor="ctr"/>
-          <a:lstStyle/>
-          <a:p>
-            <a:pPr indent="0" marL="0">
-              <a:buNone/>
-            </a:pPr>
-            <a:r>
-              <a:rPr lang="en-US" sz="1200" b="1" dirty="0">
+            <a:off x="777240" y="8257032"/>
+            <a:ext cx="1691640" cy="384048"/>
+          </a:xfrm>
+          <a:prstGeom prst="rect">
+            <a:avLst/>
+          </a:prstGeom>
+          <a:noFill/>
+          <a:ln/>
+        </p:spPr>
+        <p:txBody>
+          <a:bodyPr wrap="square" lIns="0" tIns="0" rIns="0" bIns="0" rtlCol="0" anchor="ctr"/>
+          <a:lstStyle/>
+          <a:p>
+            <a:pPr algn="ctr" indent="0" marL="0">
+              <a:buNone/>
+            </a:pPr>
+            <a:r>
+              <a:rPr lang="en-US" sz="1250" b="1" dirty="0">
                 <a:solidFill>
                   <a:srgbClr val="00A8FF"/>
                 </a:solidFill>
@@ -6975,7 +6896,7 @@
               </a:rPr>
               <a:t>Semana 4</a:t>
             </a:r>
-            <a:endParaRPr lang="en-US" sz="1200" dirty="0"/>
+            <a:endParaRPr lang="en-US" sz="1250" dirty="0"/>
           </a:p>
         </p:txBody>
       </p:sp>
@@ -6987,8 +6908,8 @@
         </p:nvSpPr>
         <p:spPr>
           <a:xfrm>
-            <a:off x="8321040" y="3017520"/>
-            <a:ext cx="3017520" cy="2743200"/>
+            <a:off x="777240" y="8823960"/>
+            <a:ext cx="5303520" cy="1508760"/>
           </a:xfrm>
           <a:prstGeom prst="rect">
             <a:avLst/>
@@ -7002,12 +6923,12 @@
           <a:p>
             <a:pPr indent="0" marL="0">
               <a:lnSpc>
-                <a:spcPct val="130000"/>
+                <a:spcPct val="132000"/>
               </a:lnSpc>
               <a:buNone/>
             </a:pPr>
             <a:r>
-              <a:rPr lang="en-US" sz="1200" dirty="0">
+              <a:rPr lang="en-US" sz="1250" dirty="0">
                 <a:solidFill>
                   <a:srgbClr val="9A9A9A"/>
                 </a:solidFill>
@@ -7017,7 +6938,7 @@
               </a:rPr>
               <a:t>Primer Drop presentado por vos, con los aprendizajes de las semanas anteriores.</a:t>
             </a:r>
-            <a:endParaRPr lang="en-US" sz="1200" dirty="0"/>
+            <a:endParaRPr lang="en-US" sz="1250" dirty="0"/>
           </a:p>
         </p:txBody>
       </p:sp>
@@ -7029,8 +6950,8 @@
         </p:nvSpPr>
         <p:spPr>
           <a:xfrm>
-            <a:off x="11365992" y="6400800"/>
-            <a:ext cx="548640" cy="274320"/>
+            <a:off x="5989320" y="11750040"/>
+            <a:ext cx="457200" cy="256032"/>
           </a:xfrm>
           <a:prstGeom prst="rect">
             <a:avLst/>
@@ -7046,7 +6967,7 @@
               <a:buNone/>
             </a:pPr>
             <a:r>
-              <a:rPr lang="en-US" sz="1000" dirty="0">
+              <a:rPr lang="en-US" sz="900" dirty="0">
                 <a:solidFill>
                   <a:srgbClr val="6E6E6E"/>
                 </a:solidFill>
@@ -7056,7 +6977,7 @@
               </a:rPr>
               <a:t>08</a:t>
             </a:r>
-            <a:endParaRPr lang="en-US" sz="1000" dirty="0"/>
+            <a:endParaRPr lang="en-US" sz="900" dirty="0"/>
           </a:p>
         </p:txBody>
       </p:sp>
@@ -7068,8 +6989,8 @@
         </p:nvSpPr>
         <p:spPr>
           <a:xfrm>
-            <a:off x="457200" y="6400800"/>
-            <a:ext cx="5486400" cy="274320"/>
+            <a:off x="502920" y="11750040"/>
+            <a:ext cx="4114800" cy="256032"/>
           </a:xfrm>
           <a:prstGeom prst="rect">
             <a:avLst/>
@@ -7085,7 +7006,7 @@
               <a:buNone/>
             </a:pPr>
             <a:r>
-              <a:rPr lang="en-US" sz="900" spc="100" kern="0" dirty="0">
+              <a:rPr lang="en-US" sz="800" spc="50" kern="0" dirty="0">
                 <a:solidFill>
                   <a:srgbClr val="6E6E6E"/>
                 </a:solidFill>
@@ -7095,7 +7016,7 @@
               </a:rPr>
               <a:t>TONY IMPORTADOS × MARCO</a:t>
             </a:r>
-            <a:endParaRPr lang="en-US" sz="900" dirty="0"/>
+            <a:endParaRPr lang="en-US" sz="800" dirty="0"/>
           </a:p>
         </p:txBody>
       </p:sp>
@@ -7132,24 +7053,24 @@
         </p:nvSpPr>
         <p:spPr>
           <a:xfrm>
-            <a:off x="640080" y="502920"/>
-            <a:ext cx="9144000" cy="320040"/>
-          </a:xfrm>
-          <a:prstGeom prst="rect">
-            <a:avLst/>
-          </a:prstGeom>
-          <a:noFill/>
-          <a:ln/>
-        </p:spPr>
-        <p:txBody>
-          <a:bodyPr wrap="square" lIns="0" tIns="0" rIns="0" bIns="0" rtlCol="0" anchor="ctr"/>
-          <a:lstStyle/>
-          <a:p>
-            <a:pPr indent="0" marL="0">
-              <a:buNone/>
-            </a:pPr>
-            <a:r>
-              <a:rPr lang="en-US" sz="1300" b="1" spc="200" kern="0" dirty="0">
+            <a:off x="502920" y="548640"/>
+            <a:ext cx="5852160" cy="292608"/>
+          </a:xfrm>
+          <a:prstGeom prst="rect">
+            <a:avLst/>
+          </a:prstGeom>
+          <a:noFill/>
+          <a:ln/>
+        </p:spPr>
+        <p:txBody>
+          <a:bodyPr wrap="square" lIns="0" tIns="0" rIns="0" bIns="0" rtlCol="0" anchor="ctr"/>
+          <a:lstStyle/>
+          <a:p>
+            <a:pPr indent="0" marL="0">
+              <a:buNone/>
+            </a:pPr>
+            <a:r>
+              <a:rPr lang="en-US" sz="1200" b="1" spc="180" kern="0" dirty="0">
                 <a:solidFill>
                   <a:srgbClr val="FFD600"/>
                 </a:solidFill>
@@ -7159,7 +7080,7 @@
               </a:rPr>
               <a:t>QUÉ SIGUE</a:t>
             </a:r>
-            <a:endParaRPr lang="en-US" sz="1300" dirty="0"/>
+            <a:endParaRPr lang="en-US" sz="1200" dirty="0"/>
           </a:p>
         </p:txBody>
       </p:sp>
@@ -7171,8 +7092,8 @@
         </p:nvSpPr>
         <p:spPr>
           <a:xfrm>
-            <a:off x="640080" y="777240"/>
-            <a:ext cx="10881360" cy="1188720"/>
+            <a:off x="502920" y="914400"/>
+            <a:ext cx="5852160" cy="1417320"/>
           </a:xfrm>
           <a:prstGeom prst="rect">
             <a:avLst/>
@@ -7186,12 +7107,12 @@
           <a:p>
             <a:pPr indent="0" marL="0">
               <a:lnSpc>
-                <a:spcPct val="100000"/>
+                <a:spcPct val="103000"/>
               </a:lnSpc>
               <a:buNone/>
             </a:pPr>
             <a:r>
-              <a:rPr lang="en-US" sz="3000" b="1" dirty="0">
+              <a:rPr lang="en-US" sz="2600" b="1" dirty="0">
                 <a:solidFill>
                   <a:srgbClr val="FFFFFF"/>
                 </a:solidFill>
@@ -7201,7 +7122,7 @@
               </a:rPr>
               <a:t>Lo hablamos y lo definimos juntos</a:t>
             </a:r>
-            <a:endParaRPr lang="en-US" sz="3000" dirty="0"/>
+            <a:endParaRPr lang="en-US" sz="2600" dirty="0"/>
           </a:p>
         </p:txBody>
       </p:sp>
@@ -7213,12 +7134,12 @@
         </p:nvSpPr>
         <p:spPr>
           <a:xfrm>
-            <a:off x="640080" y="2194560"/>
-            <a:ext cx="5349240" cy="3931920"/>
+            <a:off x="502920" y="2606040"/>
+            <a:ext cx="5852160" cy="3200400"/>
           </a:xfrm>
           <a:prstGeom prst="roundRect">
             <a:avLst>
-              <a:gd name="adj" fmla="val 2093"/>
+              <a:gd name="adj" fmla="val 2571"/>
             </a:avLst>
           </a:prstGeom>
           <a:solidFill>
@@ -7242,24 +7163,24 @@
         </p:nvSpPr>
         <p:spPr>
           <a:xfrm>
-            <a:off x="914400" y="2423160"/>
-            <a:ext cx="4754880" cy="274320"/>
-          </a:xfrm>
-          <a:prstGeom prst="rect">
-            <a:avLst/>
-          </a:prstGeom>
-          <a:noFill/>
-          <a:ln/>
-        </p:spPr>
-        <p:txBody>
-          <a:bodyPr wrap="square" lIns="0" tIns="0" rIns="0" bIns="0" rtlCol="0" anchor="ctr"/>
-          <a:lstStyle/>
-          <a:p>
-            <a:pPr indent="0" marL="0">
-              <a:buNone/>
-            </a:pPr>
-            <a:r>
-              <a:rPr lang="en-US" sz="1100" b="1" spc="150" kern="0" dirty="0">
+            <a:off x="777240" y="2834640"/>
+            <a:ext cx="5303520" cy="274320"/>
+          </a:xfrm>
+          <a:prstGeom prst="rect">
+            <a:avLst/>
+          </a:prstGeom>
+          <a:noFill/>
+          <a:ln/>
+        </p:spPr>
+        <p:txBody>
+          <a:bodyPr wrap="square" lIns="0" tIns="0" rIns="0" bIns="0" rtlCol="0" anchor="ctr"/>
+          <a:lstStyle/>
+          <a:p>
+            <a:pPr indent="0" marL="0">
+              <a:buNone/>
+            </a:pPr>
+            <a:r>
+              <a:rPr lang="en-US" sz="1100" b="1" spc="120" kern="0" dirty="0">
                 <a:solidFill>
                   <a:srgbClr val="9A9A9A"/>
                 </a:solidFill>
@@ -7281,8 +7202,8 @@
         </p:nvSpPr>
         <p:spPr>
           <a:xfrm>
-            <a:off x="914400" y="2788920"/>
-            <a:ext cx="274320" cy="548640"/>
+            <a:off x="777240" y="3200400"/>
+            <a:ext cx="274320" cy="640080"/>
           </a:xfrm>
           <a:prstGeom prst="rect">
             <a:avLst/>
@@ -7320,8 +7241,8 @@
         </p:nvSpPr>
         <p:spPr>
           <a:xfrm>
-            <a:off x="1188720" y="2788920"/>
-            <a:ext cx="4480560" cy="777240"/>
+            <a:off x="1069848" y="3200400"/>
+            <a:ext cx="4983480" cy="640080"/>
           </a:xfrm>
           <a:prstGeom prst="rect">
             <a:avLst/>
@@ -7335,7 +7256,7 @@
           <a:p>
             <a:pPr indent="0" marL="0">
               <a:lnSpc>
-                <a:spcPct val="125000"/>
+                <a:spcPct val="128000"/>
               </a:lnSpc>
               <a:buNone/>
             </a:pPr>
@@ -7362,8 +7283,8 @@
         </p:nvSpPr>
         <p:spPr>
           <a:xfrm>
-            <a:off x="914400" y="3703320"/>
-            <a:ext cx="274320" cy="548640"/>
+            <a:off x="777240" y="3886200"/>
+            <a:ext cx="274320" cy="640080"/>
           </a:xfrm>
           <a:prstGeom prst="rect">
             <a:avLst/>
@@ -7401,8 +7322,8 @@
         </p:nvSpPr>
         <p:spPr>
           <a:xfrm>
-            <a:off x="1188720" y="3703320"/>
-            <a:ext cx="4480560" cy="777240"/>
+            <a:off x="1069848" y="3886200"/>
+            <a:ext cx="4983480" cy="640080"/>
           </a:xfrm>
           <a:prstGeom prst="rect">
             <a:avLst/>
@@ -7416,7 +7337,7 @@
           <a:p>
             <a:pPr indent="0" marL="0">
               <a:lnSpc>
-                <a:spcPct val="125000"/>
+                <a:spcPct val="128000"/>
               </a:lnSpc>
               <a:buNone/>
             </a:pPr>
@@ -7443,8 +7364,8 @@
         </p:nvSpPr>
         <p:spPr>
           <a:xfrm>
-            <a:off x="914400" y="4617720"/>
-            <a:ext cx="274320" cy="548640"/>
+            <a:off x="777240" y="4572000"/>
+            <a:ext cx="274320" cy="640080"/>
           </a:xfrm>
           <a:prstGeom prst="rect">
             <a:avLst/>
@@ -7482,8 +7403,8 @@
         </p:nvSpPr>
         <p:spPr>
           <a:xfrm>
-            <a:off x="1188720" y="4617720"/>
-            <a:ext cx="4480560" cy="777240"/>
+            <a:off x="1069848" y="4572000"/>
+            <a:ext cx="4983480" cy="640080"/>
           </a:xfrm>
           <a:prstGeom prst="rect">
             <a:avLst/>
@@ -7497,7 +7418,7 @@
           <a:p>
             <a:pPr indent="0" marL="0">
               <a:lnSpc>
-                <a:spcPct val="125000"/>
+                <a:spcPct val="128000"/>
               </a:lnSpc>
               <a:buNone/>
             </a:pPr>
@@ -7524,12 +7445,12 @@
         </p:nvSpPr>
         <p:spPr>
           <a:xfrm>
-            <a:off x="6263640" y="2194560"/>
-            <a:ext cx="5285232" cy="3931920"/>
+            <a:off x="502920" y="6080760"/>
+            <a:ext cx="5852160" cy="3108960"/>
           </a:xfrm>
           <a:prstGeom prst="roundRect">
             <a:avLst>
-              <a:gd name="adj" fmla="val 2093"/>
+              <a:gd name="adj" fmla="val 2647"/>
             </a:avLst>
           </a:prstGeom>
           <a:solidFill>
@@ -7553,24 +7474,24 @@
         </p:nvSpPr>
         <p:spPr>
           <a:xfrm>
-            <a:off x="6537960" y="2423160"/>
-            <a:ext cx="4754880" cy="274320"/>
-          </a:xfrm>
-          <a:prstGeom prst="rect">
-            <a:avLst/>
-          </a:prstGeom>
-          <a:noFill/>
-          <a:ln/>
-        </p:spPr>
-        <p:txBody>
-          <a:bodyPr wrap="square" lIns="0" tIns="0" rIns="0" bIns="0" rtlCol="0" anchor="ctr"/>
-          <a:lstStyle/>
-          <a:p>
-            <a:pPr indent="0" marL="0">
-              <a:buNone/>
-            </a:pPr>
-            <a:r>
-              <a:rPr lang="en-US" sz="1100" b="1" spc="150" kern="0" dirty="0">
+            <a:off x="777240" y="6309360"/>
+            <a:ext cx="5303520" cy="274320"/>
+          </a:xfrm>
+          <a:prstGeom prst="rect">
+            <a:avLst/>
+          </a:prstGeom>
+          <a:noFill/>
+          <a:ln/>
+        </p:spPr>
+        <p:txBody>
+          <a:bodyPr wrap="square" lIns="0" tIns="0" rIns="0" bIns="0" rtlCol="0" anchor="ctr"/>
+          <a:lstStyle/>
+          <a:p>
+            <a:pPr indent="0" marL="0">
+              <a:buNone/>
+            </a:pPr>
+            <a:r>
+              <a:rPr lang="en-US" sz="1100" b="1" spc="120" kern="0" dirty="0">
                 <a:solidFill>
                   <a:srgbClr val="FFD600"/>
                 </a:solidFill>
@@ -7592,24 +7513,24 @@
         </p:nvSpPr>
         <p:spPr>
           <a:xfrm>
-            <a:off x="6537960" y="2788920"/>
-            <a:ext cx="4754880" cy="457200"/>
-          </a:xfrm>
-          <a:prstGeom prst="rect">
-            <a:avLst/>
-          </a:prstGeom>
-          <a:noFill/>
-          <a:ln/>
-        </p:spPr>
-        <p:txBody>
-          <a:bodyPr wrap="square" lIns="0" tIns="0" rIns="0" bIns="0" rtlCol="0" anchor="ctr"/>
-          <a:lstStyle/>
-          <a:p>
-            <a:pPr indent="0" marL="0">
-              <a:buNone/>
-            </a:pPr>
-            <a:r>
-              <a:rPr lang="en-US" sz="2000" b="1" dirty="0">
+            <a:off x="777240" y="6629400"/>
+            <a:ext cx="5303520" cy="457200"/>
+          </a:xfrm>
+          <a:prstGeom prst="rect">
+            <a:avLst/>
+          </a:prstGeom>
+          <a:noFill/>
+          <a:ln/>
+        </p:spPr>
+        <p:txBody>
+          <a:bodyPr wrap="square" lIns="0" tIns="0" rIns="0" bIns="0" rtlCol="0" anchor="ctr"/>
+          <a:lstStyle/>
+          <a:p>
+            <a:pPr indent="0" marL="0">
+              <a:buNone/>
+            </a:pPr>
+            <a:r>
+              <a:rPr lang="en-US" sz="1900" b="1" dirty="0">
                 <a:solidFill>
                   <a:srgbClr val="FFFFFF"/>
                 </a:solidFill>
@@ -7619,7 +7540,7 @@
               </a:rPr>
               <a:t>Una charla de 20 minutos</a:t>
             </a:r>
-            <a:endParaRPr lang="en-US" sz="2000" dirty="0"/>
+            <a:endParaRPr lang="en-US" sz="1900" dirty="0"/>
           </a:p>
         </p:txBody>
       </p:sp>
@@ -7631,8 +7552,8 @@
         </p:nvSpPr>
         <p:spPr>
           <a:xfrm>
-            <a:off x="6537960" y="3337560"/>
-            <a:ext cx="4754880" cy="1097280"/>
+            <a:off x="777240" y="7178040"/>
+            <a:ext cx="5303520" cy="1005840"/>
           </a:xfrm>
           <a:prstGeom prst="rect">
             <a:avLst/>
@@ -7651,7 +7572,7 @@
               <a:buNone/>
             </a:pPr>
             <a:r>
-              <a:rPr lang="en-US" sz="1250" dirty="0">
+              <a:rPr lang="en-US" sz="1200" dirty="0">
                 <a:solidFill>
                   <a:srgbClr val="9A9A9A"/>
                 </a:solidFill>
@@ -7661,7 +7582,7 @@
               </a:rPr>
               <a:t>Con BLUR y Cuervo Produce, para resolver dudas y ver si esto suma para los dos lados — sin compromiso todavía.</a:t>
             </a:r>
-            <a:endParaRPr lang="en-US" sz="1250" dirty="0"/>
+            <a:endParaRPr lang="en-US" sz="1200" dirty="0"/>
           </a:p>
         </p:txBody>
       </p:sp>
@@ -7673,8 +7594,8 @@
         </p:nvSpPr>
         <p:spPr>
           <a:xfrm>
-            <a:off x="6537960" y="4709160"/>
-            <a:ext cx="4709160" cy="0"/>
+            <a:off x="777240" y="8275320"/>
+            <a:ext cx="5303520" cy="0"/>
           </a:xfrm>
           <a:prstGeom prst="line">
             <a:avLst/>
@@ -7696,24 +7617,24 @@
         </p:nvSpPr>
         <p:spPr>
           <a:xfrm>
-            <a:off x="6537960" y="4892040"/>
-            <a:ext cx="4754880" cy="365760"/>
-          </a:xfrm>
-          <a:prstGeom prst="rect">
-            <a:avLst/>
-          </a:prstGeom>
-          <a:noFill/>
-          <a:ln/>
-        </p:spPr>
-        <p:txBody>
-          <a:bodyPr wrap="square" lIns="0" tIns="0" rIns="0" bIns="0" rtlCol="0" anchor="ctr"/>
-          <a:lstStyle/>
-          <a:p>
-            <a:pPr indent="0" marL="0">
-              <a:buNone/>
-            </a:pPr>
-            <a:r>
-              <a:rPr lang="en-US" sz="1250" b="1" dirty="0">
+            <a:off x="777240" y="8412480"/>
+            <a:ext cx="5303520" cy="365760"/>
+          </a:xfrm>
+          <a:prstGeom prst="rect">
+            <a:avLst/>
+          </a:prstGeom>
+          <a:noFill/>
+          <a:ln/>
+        </p:spPr>
+        <p:txBody>
+          <a:bodyPr wrap="square" lIns="0" tIns="0" rIns="0" bIns="0" rtlCol="0" anchor="ctr"/>
+          <a:lstStyle/>
+          <a:p>
+            <a:pPr indent="0" marL="0">
+              <a:buNone/>
+            </a:pPr>
+            <a:r>
+              <a:rPr lang="en-US" sz="1300" b="1" dirty="0">
                 <a:solidFill>
                   <a:srgbClr val="00A8FF"/>
                 </a:solidFill>
@@ -7723,7 +7644,7 @@
               </a:rPr>
               <a:t>Contacto vía @cuervo.8v o @ama.blur</a:t>
             </a:r>
-            <a:endParaRPr lang="en-US" sz="1250" dirty="0"/>
+            <a:endParaRPr lang="en-US" sz="1300" dirty="0"/>
           </a:p>
         </p:txBody>
       </p:sp>
@@ -7735,8 +7656,8 @@
         </p:nvSpPr>
         <p:spPr>
           <a:xfrm>
-            <a:off x="11365992" y="6400800"/>
-            <a:ext cx="548640" cy="274320"/>
+            <a:off x="5989320" y="11750040"/>
+            <a:ext cx="457200" cy="256032"/>
           </a:xfrm>
           <a:prstGeom prst="rect">
             <a:avLst/>
@@ -7752,7 +7673,7 @@
               <a:buNone/>
             </a:pPr>
             <a:r>
-              <a:rPr lang="en-US" sz="1000" dirty="0">
+              <a:rPr lang="en-US" sz="900" dirty="0">
                 <a:solidFill>
                   <a:srgbClr val="6E6E6E"/>
                 </a:solidFill>
@@ -7762,7 +7683,7 @@
               </a:rPr>
               <a:t>09</a:t>
             </a:r>
-            <a:endParaRPr lang="en-US" sz="1000" dirty="0"/>
+            <a:endParaRPr lang="en-US" sz="900" dirty="0"/>
           </a:p>
         </p:txBody>
       </p:sp>
@@ -7774,8 +7695,8 @@
         </p:nvSpPr>
         <p:spPr>
           <a:xfrm>
-            <a:off x="457200" y="6400800"/>
-            <a:ext cx="5486400" cy="274320"/>
+            <a:off x="502920" y="11750040"/>
+            <a:ext cx="4114800" cy="256032"/>
           </a:xfrm>
           <a:prstGeom prst="rect">
             <a:avLst/>
@@ -7791,7 +7712,7 @@
               <a:buNone/>
             </a:pPr>
             <a:r>
-              <a:rPr lang="en-US" sz="900" spc="100" kern="0" dirty="0">
+              <a:rPr lang="en-US" sz="800" spc="50" kern="0" dirty="0">
                 <a:solidFill>
                   <a:srgbClr val="6E6E6E"/>
                 </a:solidFill>
@@ -7801,7 +7722,7 @@
               </a:rPr>
               <a:t>TONY IMPORTADOS × MARCO</a:t>
             </a:r>
-            <a:endParaRPr lang="en-US" sz="900" dirty="0"/>
+            <a:endParaRPr lang="en-US" sz="800" dirty="0"/>
           </a:p>
         </p:txBody>
       </p:sp>
